--- a/docs/review/TrustGate_Results_2026-09-15.pptx
+++ b/docs/review/TrustGate_Results_2026-09-15.pptx
@@ -3112,8 +3112,8 @@
         </p:nvSpPr>
         <p:spPr>
           <a:xfrm>
-            <a:off x="914400" y="2148840"/>
-            <a:ext cx="10362895" cy="365760"/>
+            <a:off x="914400" y="2468880"/>
+            <a:ext cx="10058400" cy="1554480"/>
           </a:xfrm>
           <a:prstGeom prst="rect">
             <a:avLst/>
@@ -3127,82 +3127,58 @@
           <a:lstStyle/>
           <a:p>
             <a:pPr>
+              <a:lnSpc>
+                <a:spcPct val="106000"/>
+              </a:lnSpc>
+              <a:spcAft>
+                <a:spcPts val="1400"/>
+              </a:spcAft>
+            </a:pPr>
+            <a:r>
+              <a:rPr sz="3600" b="1" i="0">
+                <a:solidFill>
+                  <a:srgbClr val="000000"/>
+                </a:solidFill>
+                <a:latin typeface="Times New Roman"/>
+              </a:rPr>
+              <a:t>Trust-Gated Fast-Weight Updates for TTT-E2E LLMs</a:t>
+            </a:r>
+          </a:p>
+          <a:p>
+            <a:pPr>
               <a:spcAft>
                 <a:spcPts val="0"/>
               </a:spcAft>
             </a:pPr>
             <a:r>
-              <a:rPr sz="1200" b="1">
+              <a:rPr sz="2000" b="0" i="0">
                 <a:solidFill>
-                  <a:srgbClr val="1D4E89"/>
+                  <a:srgbClr val="000000"/>
                 </a:solidFill>
-                <a:latin typeface="Consolas"/>
+                <a:latin typeface="Times New Roman"/>
               </a:rPr>
-              <a:t>DEFENSIVE SECURITY RESEARCH</a:t>
-            </a:r>
-          </a:p>
-        </p:txBody>
-      </p:sp>
-      <p:sp>
-        <p:nvSpPr>
-          <p:cNvPr id="3" name="TextBox 2"/>
-          <p:cNvSpPr txBox="1"/>
-          <p:nvPr/>
-        </p:nvSpPr>
-        <p:spPr>
-          <a:xfrm>
-            <a:off x="914400" y="2606040"/>
-            <a:ext cx="10058400" cy="1463040"/>
-          </a:xfrm>
-          <a:prstGeom prst="rect">
-            <a:avLst/>
-          </a:prstGeom>
-          <a:noFill/>
-        </p:spPr>
-        <p:txBody>
-          <a:bodyPr wrap="square" anchor="t" lIns="0" rIns="0" tIns="0" bIns="0">
-            <a:spAutoFit/>
-          </a:bodyPr>
-          <a:lstStyle/>
-          <a:p>
-            <a:pPr>
-              <a:lnSpc>
-                <a:spcPct val="106000"/>
-              </a:lnSpc>
-              <a:spcAft>
-                <a:spcPts val="0"/>
-              </a:spcAft>
-            </a:pPr>
-            <a:r>
-              <a:rPr sz="4200" b="1">
-                <a:solidFill>
-                  <a:srgbClr val="123045"/>
-                </a:solidFill>
-                <a:latin typeface="Segoe UI"/>
-              </a:rPr>
-              <a:t>Trust-Gated Fast-Weight Updates
-for TTT-E2E LLMs</a:t>
+              <a:t>Status of work — what has been measured</a:t>
             </a:r>
           </a:p>
         </p:txBody>
       </p:sp>
       <p:cxnSp>
         <p:nvCxnSpPr>
-          <p:cNvPr id="4" name="Connector 3"/>
+          <p:cNvPr id="3" name="Connector 2"/>
           <p:cNvCxnSpPr/>
           <p:nvPr/>
         </p:nvCxnSpPr>
         <p:spPr>
           <a:xfrm>
-            <a:off x="914400" y="4315968"/>
+            <a:off x="914400" y="4443984"/>
             <a:ext cx="2743200" cy="0"/>
           </a:xfrm>
           <a:prstGeom prst="line">
             <a:avLst/>
           </a:prstGeom>
-          <a:ln w="25400">
+          <a:ln w="15875">
             <a:solidFill>
-              <a:srgbClr val="1D4E89"/>
+              <a:srgbClr val="000000"/>
             </a:solidFill>
           </a:ln>
         </p:spPr>
@@ -3223,14 +3199,14 @@
       </p:cxnSp>
       <p:sp>
         <p:nvSpPr>
-          <p:cNvPr id="5" name="TextBox 4"/>
+          <p:cNvPr id="4" name="TextBox 3"/>
           <p:cNvSpPr txBox="1"/>
           <p:nvPr/>
         </p:nvSpPr>
         <p:spPr>
           <a:xfrm>
-            <a:off x="914400" y="4553712"/>
-            <a:ext cx="9509760" cy="914400"/>
+            <a:off x="914400" y="4626864"/>
+            <a:ext cx="10058400" cy="731520"/>
           </a:xfrm>
           <a:prstGeom prst="rect">
             <a:avLst/>
@@ -3245,17 +3221,17 @@
           <a:p>
             <a:pPr>
               <a:spcAft>
-                <a:spcPts val="600"/>
+                <a:spcPts val="400"/>
               </a:spcAft>
             </a:pPr>
             <a:r>
-              <a:rPr sz="2000" b="0">
+              <a:rPr sz="1400" b="0" i="0">
                 <a:solidFill>
-                  <a:srgbClr val="5A6673"/>
+                  <a:srgbClr val="000000"/>
                 </a:solidFill>
-                <a:latin typeface="Segoe UI"/>
+                <a:latin typeface="Times New Roman"/>
               </a:rPr>
-              <a:t>What has been measured</a:t>
+              <a:t>2026-09-15</a:t>
             </a:r>
           </a:p>
           <a:p>
@@ -3265,13 +3241,13 @@
               </a:spcAft>
             </a:pPr>
             <a:r>
-              <a:rPr sz="1250" b="0">
+              <a:rPr sz="1300" b="0" i="0">
                 <a:solidFill>
-                  <a:srgbClr val="96A1AB"/>
+                  <a:srgbClr val="000000"/>
                 </a:solidFill>
-                <a:latin typeface="Consolas"/>
+                <a:latin typeface="Times New Roman"/>
               </a:rPr>
-              <a:t>2026-09-15   ·   vendor pin a4fc478   ·   corpus pin cc2adbc8</a:t>
+              <a:t>vendor pin a4fc478   |   corpus pin cc2adbc8   |   spend to date $0.13</a:t>
             </a:r>
           </a:p>
         </p:txBody>
@@ -3310,8 +3286,8 @@
         </p:nvSpPr>
         <p:spPr>
           <a:xfrm>
-            <a:off x="914400" y="658368"/>
-            <a:ext cx="10362895" cy="274320"/>
+            <a:off x="914400" y="566928"/>
+            <a:ext cx="10362895" cy="822960"/>
           </a:xfrm>
           <a:prstGeom prst="rect">
             <a:avLst/>
@@ -3325,81 +3301,42 @@
           <a:lstStyle/>
           <a:p>
             <a:pPr>
-              <a:spcAft>
-                <a:spcPts val="0"/>
-              </a:spcAft>
-            </a:pPr>
-            <a:r>
-              <a:rPr sz="1150" b="1">
-                <a:solidFill>
-                  <a:srgbClr val="1D4E89"/>
-                </a:solidFill>
-                <a:latin typeface="Consolas"/>
-              </a:rPr>
-              <a:t>THE QUESTION</a:t>
-            </a:r>
-          </a:p>
-        </p:txBody>
-      </p:sp>
-      <p:sp>
-        <p:nvSpPr>
-          <p:cNvPr id="3" name="TextBox 2"/>
-          <p:cNvSpPr txBox="1"/>
-          <p:nvPr/>
-        </p:nvSpPr>
-        <p:spPr>
-          <a:xfrm>
-            <a:off x="914400" y="987552"/>
-            <a:ext cx="10362895" cy="914400"/>
-          </a:xfrm>
-          <a:prstGeom prst="rect">
-            <a:avLst/>
-          </a:prstGeom>
-          <a:noFill/>
-        </p:spPr>
-        <p:txBody>
-          <a:bodyPr wrap="square" anchor="t" lIns="0" rIns="0" tIns="0" bIns="0">
-            <a:spAutoFit/>
-          </a:bodyPr>
-          <a:lstStyle/>
-          <a:p>
-            <a:pPr>
               <a:lnSpc>
-                <a:spcPct val="105000"/>
+                <a:spcPct val="104000"/>
               </a:lnSpc>
               <a:spcAft>
                 <a:spcPts val="0"/>
               </a:spcAft>
             </a:pPr>
             <a:r>
-              <a:rPr sz="3000" b="1">
+              <a:rPr sz="2800" b="1" i="0">
                 <a:solidFill>
-                  <a:srgbClr val="123045"/>
+                  <a:srgbClr val="000000"/>
                 </a:solidFill>
-                <a:latin typeface="Segoe UI"/>
+                <a:latin typeface="Times New Roman"/>
               </a:rPr>
-              <a:t>Can a benign-looking stream corrupt a model that learns at inference?</a:t>
+              <a:t>Summary</a:t>
             </a:r>
           </a:p>
         </p:txBody>
       </p:sp>
       <p:cxnSp>
         <p:nvCxnSpPr>
-          <p:cNvPr id="4" name="Connector 3"/>
+          <p:cNvPr id="3" name="Connector 2"/>
           <p:cNvCxnSpPr/>
           <p:nvPr/>
         </p:nvCxnSpPr>
         <p:spPr>
           <a:xfrm>
-            <a:off x="914400" y="1673351"/>
+            <a:off x="914400" y="1389888"/>
             <a:ext cx="10362895" cy="0"/>
           </a:xfrm>
           <a:prstGeom prst="line">
             <a:avLst/>
           </a:prstGeom>
-          <a:ln w="12700">
+          <a:ln w="9525">
             <a:solidFill>
-              <a:srgbClr val="D3DAE2"/>
+              <a:srgbClr val="000000"/>
             </a:solidFill>
           </a:ln>
         </p:spPr>
@@ -3420,14 +3357,14 @@
       </p:cxnSp>
       <p:sp>
         <p:nvSpPr>
-          <p:cNvPr id="5" name="TextBox 4"/>
+          <p:cNvPr id="4" name="TextBox 3"/>
           <p:cNvSpPr txBox="1"/>
           <p:nvPr/>
         </p:nvSpPr>
         <p:spPr>
           <a:xfrm>
-            <a:off x="914400" y="6291072"/>
-            <a:ext cx="10362895" cy="256032"/>
+            <a:off x="914400" y="6327648"/>
+            <a:ext cx="10362895" cy="237744"/>
           </a:xfrm>
           <a:prstGeom prst="rect">
             <a:avLst/>
@@ -3446,27 +3383,27 @@
               </a:spcAft>
             </a:pPr>
             <a:r>
-              <a:rPr sz="950" b="0">
+              <a:rPr sz="1000" b="0" i="0">
                 <a:solidFill>
-                  <a:srgbClr val="96A1AB"/>
+                  <a:srgbClr val="000000"/>
                 </a:solidFill>
-                <a:latin typeface="Consolas"/>
+                <a:latin typeface="Times New Roman"/>
               </a:rPr>
-              <a:t>Trust-Gated Fast-Weight Updates for TTT-E2E LLMs     ·     2026-09-15     ·     1</a:t>
-            </a:r>
-          </a:p>
-        </p:txBody>
-      </p:sp>
-      <p:sp>
-        <p:nvSpPr>
-          <p:cNvPr id="6" name="TextBox 5"/>
+              <a:t>Trust-Gated Fast-Weight Updates for TTT-E2E LLMs   |   2026-09-15   |   1</a:t>
+            </a:r>
+          </a:p>
+        </p:txBody>
+      </p:sp>
+      <p:sp>
+        <p:nvSpPr>
+          <p:cNvPr id="5" name="TextBox 4"/>
           <p:cNvSpPr txBox="1"/>
           <p:nvPr/>
         </p:nvSpPr>
         <p:spPr>
           <a:xfrm>
-            <a:off x="914400" y="1874519"/>
-            <a:ext cx="9326880" cy="1188720"/>
+            <a:off x="914400" y="1627632"/>
+            <a:ext cx="10058400" cy="3657600"/>
           </a:xfrm>
           <a:prstGeom prst="rect">
             <a:avLst/>
@@ -3481,173 +3418,392 @@
           <a:p>
             <a:pPr>
               <a:lnSpc>
-                <a:spcPct val="128000"/>
+                <a:spcPct val="116000"/>
               </a:lnSpc>
               <a:spcAft>
-                <a:spcPts val="0"/>
+                <a:spcPts val="1100"/>
               </a:spcAft>
             </a:pPr>
             <a:r>
-              <a:rPr sz="1900" b="0">
+              <a:rPr sz="1700" b="1">
                 <a:solidFill>
-                  <a:srgbClr val="5A6673"/>
+                  <a:srgbClr val="000000"/>
                 </a:solidFill>
-                <a:latin typeface="Segoe UI"/>
+                <a:latin typeface="Times New Roman"/>
               </a:rPr>
-              <a:t>TTT-E2E updates a small set of fast weights by gradient descent during the forward pass. Those weights are 6.2% of the model, and they are written to by whatever text arrives. That is an attack surface no frozen model has.</a:t>
-            </a:r>
-          </a:p>
-        </p:txBody>
-      </p:sp>
-      <p:sp>
-        <p:nvSpPr>
-          <p:cNvPr id="7" name="TextBox 6"/>
-          <p:cNvSpPr txBox="1"/>
-          <p:nvPr/>
-        </p:nvSpPr>
-        <p:spPr>
-          <a:xfrm>
-            <a:off x="914400" y="3428999"/>
-            <a:ext cx="9692640" cy="3108960"/>
-          </a:xfrm>
-          <a:prstGeom prst="rect">
-            <a:avLst/>
-          </a:prstGeom>
-          <a:noFill/>
-        </p:spPr>
-        <p:txBody>
-          <a:bodyPr wrap="square" anchor="t" lIns="0" rIns="0" tIns="0" bIns="0">
-            <a:spAutoFit/>
-          </a:bodyPr>
-          <a:lstStyle/>
+              <a:t>—  Done.</a:t>
+            </a:r>
+            <a:r>
+              <a:rPr sz="1700">
+                <a:solidFill>
+                  <a:srgbClr val="000000"/>
+                </a:solidFill>
+                <a:latin typeface="Times New Roman"/>
+              </a:rPr>
+              <a:t>  002 complete and reproducible. 003 executes the vendor model. Cost model measured against the live bucket.</a:t>
+            </a:r>
+          </a:p>
           <a:p>
             <a:pPr>
               <a:lnSpc>
-                <a:spcPct val="122000"/>
+                <a:spcPct val="116000"/>
               </a:lnSpc>
               <a:spcAft>
-                <a:spcPts val="1500"/>
+                <a:spcPts val="1100"/>
               </a:spcAft>
             </a:pPr>
             <a:r>
-              <a:rPr sz="1600" b="1">
+              <a:rPr sz="1700" b="1">
                 <a:solidFill>
-                  <a:srgbClr val="10151C"/>
+                  <a:srgbClr val="000000"/>
                 </a:solidFill>
-                <a:latin typeface="Segoe UI"/>
+                <a:latin typeface="Times New Roman"/>
               </a:rPr>
-              <a:t>The kill-gate.</a:t>
-            </a:r>
-            <a:r>
-              <a:rPr sz="1600">
+              <a:t>—  Not done.</a:t>
+            </a:r>
+            <a:r>
+              <a:rPr sz="1700">
                 <a:solidFill>
-                  <a:srgbClr val="5A6673"/>
+                  <a:srgbClr val="000000"/>
                 </a:solidFill>
-                <a:latin typeface="Segoe UI"/>
+                <a:latin typeface="Times New Roman"/>
               </a:rPr>
-              <a:t>  An attack must clear all three pre-registered bars: Cohen's d ≥ 0.8, relative degradation ≥ 10%, fluency ratio ≤ 1.5.</a:t>
+              <a:t>  Kill-gate (001). Fast-weight carry. 1B baseline.</a:t>
             </a:r>
           </a:p>
           <a:p>
             <a:pPr>
               <a:lnSpc>
-                <a:spcPct val="122000"/>
+                <a:spcPct val="116000"/>
               </a:lnSpc>
               <a:spcAft>
-                <a:spcPts val="1500"/>
+                <a:spcPts val="1100"/>
               </a:spcAft>
             </a:pPr>
             <a:r>
-              <a:rPr sz="1600" b="1">
+              <a:rPr sz="1700" b="1">
                 <a:solidFill>
-                  <a:srgbClr val="10151C"/>
+                  <a:srgbClr val="000000"/>
                 </a:solidFill>
-                <a:latin typeface="Segoe UI"/>
+                <a:latin typeface="Times New Roman"/>
               </a:rPr>
-              <a:t>Why a gate, not a patch.</a:t>
-            </a:r>
-            <a:r>
-              <a:rPr sz="1600">
+              <a:t>—  Verdict.</a:t>
+            </a:r>
+            <a:r>
+              <a:rPr sz="1700">
                 <a:solidFill>
-                  <a:srgbClr val="5A6673"/>
+                  <a:srgbClr val="000000"/>
                 </a:solidFill>
-                <a:latin typeface="Segoe UI"/>
+                <a:latin typeface="Times New Roman"/>
               </a:rPr>
-              <a:t>  If no benign-looking attack exists, there is no defence worth building — and the project stops.</a:t>
+              <a:t>  None. Nothing here is a PROCEED or a STOP.</a:t>
             </a:r>
           </a:p>
           <a:p>
             <a:pPr>
               <a:lnSpc>
-                <a:spcPct val="122000"/>
+                <a:spcPct val="116000"/>
               </a:lnSpc>
               <a:spcAft>
-                <a:spcPts val="1500"/>
+                <a:spcPts val="1100"/>
               </a:spcAft>
             </a:pPr>
             <a:r>
-              <a:rPr sz="1600" b="1">
+              <a:rPr sz="1700" b="1">
                 <a:solidFill>
-                  <a:srgbClr val="10151C"/>
+                  <a:srgbClr val="000000"/>
                 </a:solidFill>
-                <a:latin typeface="Segoe UI"/>
+                <a:latin typeface="Times New Roman"/>
               </a:rPr>
-              <a:t>Status.</a:t>
-            </a:r>
-            <a:r>
-              <a:rPr sz="1600">
+              <a:t>—  Spend.</a:t>
+            </a:r>
+            <a:r>
+              <a:rPr sz="1700">
                 <a:solidFill>
-                  <a:srgbClr val="5A6673"/>
+                  <a:srgbClr val="000000"/>
                 </a:solidFill>
-                <a:latin typeface="Segoe UI"/>
+                <a:latin typeface="Times New Roman"/>
               </a:rPr>
-              <a:t>  The gate has not been run. Nothing in this deck is a verdict.</a:t>
-            </a:r>
-          </a:p>
-        </p:txBody>
-      </p:sp>
-      <p:sp>
-        <p:nvSpPr>
-          <p:cNvPr id="8" name="TextBox 7"/>
-          <p:cNvSpPr txBox="1"/>
+              <a:t>  $0.13, one GCS transfer. All compute so far on free hardware.</a:t>
+            </a:r>
+          </a:p>
+        </p:txBody>
+      </p:sp>
+      <p:graphicFrame>
+        <p:nvGraphicFramePr>
+          <p:cNvPr id="6" name="Table 5"/>
+          <p:cNvGraphicFramePr>
+            <a:graphicFrameLocks noGrp="1"/>
+          </p:cNvGraphicFramePr>
           <p:nvPr/>
-        </p:nvSpPr>
-        <p:spPr>
-          <a:xfrm>
-            <a:off x="914400" y="4855463"/>
-            <a:ext cx="9692640" cy="822960"/>
-          </a:xfrm>
-          <a:prstGeom prst="rect">
-            <a:avLst/>
-          </a:prstGeom>
-          <a:noFill/>
-        </p:spPr>
-        <p:txBody>
-          <a:bodyPr wrap="square" anchor="t" lIns="0" rIns="0" tIns="0" bIns="0">
-            <a:spAutoFit/>
-          </a:bodyPr>
-          <a:lstStyle/>
-          <a:p>
-            <a:pPr>
-              <a:lnSpc>
-                <a:spcPct val="135000"/>
-              </a:lnSpc>
-              <a:spcAft>
-                <a:spcPts val="0"/>
-              </a:spcAft>
-            </a:pPr>
-            <a:r>
-              <a:rPr sz="1250" b="0">
-                <a:solidFill>
-                  <a:srgbClr val="5A6673"/>
-                </a:solidFill>
-                <a:latin typeface="Consolas"/>
-              </a:rPr>
-              <a:t>PREREGISTERED.md, frozen 2026-08-08. Bars are reported against, never moved.</a:t>
-            </a:r>
-          </a:p>
-        </p:txBody>
-      </p:sp>
+        </p:nvGraphicFramePr>
+        <p:xfrm>
+          <a:off x="914400" y="3319272"/>
+          <a:ext cx="9875520" cy="1463040"/>
+        </p:xfrm>
+        <a:graphic>
+          <a:graphicData uri="http://schemas.openxmlformats.org/drawingml/2006/table">
+            <a:tbl>
+              <a:tblPr>
+                <a:tableStyleId>{5C22544A-7EE6-4342-B048-85BDC9FD1C3A}</a:tableStyleId>
+              </a:tblPr>
+              <a:tblGrid>
+                <a:gridCol w="3291840"/>
+                <a:gridCol w="2011680"/>
+                <a:gridCol w="4572000"/>
+              </a:tblGrid>
+              <a:tr h="365760">
+                <a:tc>
+                  <a:txBody>
+                    <a:bodyPr wrap="square"/>
+                    <a:lstStyle/>
+                    <a:p>
+                      <a:r>
+                        <a:rPr sz="1400" b="1" i="1">
+                          <a:solidFill>
+                            <a:srgbClr val="000000"/>
+                          </a:solidFill>
+                          <a:latin typeface="Times New Roman"/>
+                        </a:rPr>
+                        <a:t>Pre-registered bar</a:t>
+                      </a:r>
+                    </a:p>
+                  </a:txBody>
+                  <a:tcPr marL="0" marR="146304" marT="36576" marB="36576" anchor="ctr">
+                    <a:noFill/>
+                  </a:tcPr>
+                </a:tc>
+                <a:tc>
+                  <a:txBody>
+                    <a:bodyPr wrap="square"/>
+                    <a:lstStyle/>
+                    <a:p>
+                      <a:r>
+                        <a:rPr sz="1400" b="1" i="1">
+                          <a:solidFill>
+                            <a:srgbClr val="000000"/>
+                          </a:solidFill>
+                          <a:latin typeface="Times New Roman"/>
+                        </a:rPr>
+                        <a:t>Value</a:t>
+                      </a:r>
+                    </a:p>
+                  </a:txBody>
+                  <a:tcPr marL="0" marR="146304" marT="36576" marB="36576" anchor="ctr">
+                    <a:noFill/>
+                  </a:tcPr>
+                </a:tc>
+                <a:tc>
+                  <a:txBody>
+                    <a:bodyPr wrap="square"/>
+                    <a:lstStyle/>
+                    <a:p>
+                      <a:r>
+                        <a:rPr sz="1400" b="1" i="1">
+                          <a:solidFill>
+                            <a:srgbClr val="000000"/>
+                          </a:solidFill>
+                          <a:latin typeface="Times New Roman"/>
+                        </a:rPr>
+                        <a:t>Status</a:t>
+                      </a:r>
+                    </a:p>
+                  </a:txBody>
+                  <a:tcPr marL="0" marR="146304" marT="36576" marB="36576" anchor="ctr">
+                    <a:noFill/>
+                  </a:tcPr>
+                </a:tc>
+              </a:tr>
+              <a:tr h="365760">
+                <a:tc>
+                  <a:txBody>
+                    <a:bodyPr wrap="square"/>
+                    <a:lstStyle/>
+                    <a:p>
+                      <a:r>
+                        <a:rPr sz="1400" b="0" i="0">
+                          <a:solidFill>
+                            <a:srgbClr val="000000"/>
+                          </a:solidFill>
+                          <a:latin typeface="Times New Roman"/>
+                        </a:rPr>
+                        <a:t>Cohen's d</a:t>
+                      </a:r>
+                    </a:p>
+                  </a:txBody>
+                  <a:tcPr marL="0" marR="146304" marT="36576" marB="36576" anchor="ctr">
+                    <a:noFill/>
+                  </a:tcPr>
+                </a:tc>
+                <a:tc>
+                  <a:txBody>
+                    <a:bodyPr wrap="square"/>
+                    <a:lstStyle/>
+                    <a:p>
+                      <a:r>
+                        <a:rPr sz="1400" b="0" i="0">
+                          <a:solidFill>
+                            <a:srgbClr val="000000"/>
+                          </a:solidFill>
+                          <a:latin typeface="Times New Roman"/>
+                        </a:rPr>
+                        <a:t>≥ 0.80</a:t>
+                      </a:r>
+                    </a:p>
+                  </a:txBody>
+                  <a:tcPr marL="0" marR="146304" marT="36576" marB="36576" anchor="ctr">
+                    <a:noFill/>
+                  </a:tcPr>
+                </a:tc>
+                <a:tc>
+                  <a:txBody>
+                    <a:bodyPr wrap="square"/>
+                    <a:lstStyle/>
+                    <a:p>
+                      <a:r>
+                        <a:rPr sz="1400" b="0" i="0">
+                          <a:solidFill>
+                            <a:srgbClr val="000000"/>
+                          </a:solidFill>
+                          <a:latin typeface="Times New Roman"/>
+                        </a:rPr>
+                        <a:t>frozen 2026-08-08, untouched</a:t>
+                      </a:r>
+                    </a:p>
+                  </a:txBody>
+                  <a:tcPr marL="0" marR="146304" marT="36576" marB="36576" anchor="ctr">
+                    <a:noFill/>
+                  </a:tcPr>
+                </a:tc>
+              </a:tr>
+              <a:tr h="365760">
+                <a:tc>
+                  <a:txBody>
+                    <a:bodyPr wrap="square"/>
+                    <a:lstStyle/>
+                    <a:p>
+                      <a:r>
+                        <a:rPr sz="1400" b="0" i="0">
+                          <a:solidFill>
+                            <a:srgbClr val="000000"/>
+                          </a:solidFill>
+                          <a:latin typeface="Times New Roman"/>
+                        </a:rPr>
+                        <a:t>Relative degradation</a:t>
+                      </a:r>
+                    </a:p>
+                  </a:txBody>
+                  <a:tcPr marL="0" marR="146304" marT="36576" marB="36576" anchor="ctr">
+                    <a:noFill/>
+                  </a:tcPr>
+                </a:tc>
+                <a:tc>
+                  <a:txBody>
+                    <a:bodyPr wrap="square"/>
+                    <a:lstStyle/>
+                    <a:p>
+                      <a:r>
+                        <a:rPr sz="1400" b="0" i="0">
+                          <a:solidFill>
+                            <a:srgbClr val="000000"/>
+                          </a:solidFill>
+                          <a:latin typeface="Times New Roman"/>
+                        </a:rPr>
+                        <a:t>≥ 10%</a:t>
+                      </a:r>
+                    </a:p>
+                  </a:txBody>
+                  <a:tcPr marL="0" marR="146304" marT="36576" marB="36576" anchor="ctr">
+                    <a:noFill/>
+                  </a:tcPr>
+                </a:tc>
+                <a:tc>
+                  <a:txBody>
+                    <a:bodyPr wrap="square"/>
+                    <a:lstStyle/>
+                    <a:p>
+                      <a:r>
+                        <a:rPr sz="1400" b="0" i="0">
+                          <a:solidFill>
+                            <a:srgbClr val="000000"/>
+                          </a:solidFill>
+                          <a:latin typeface="Times New Roman"/>
+                        </a:rPr>
+                        <a:t>frozen 2026-08-08, untouched</a:t>
+                      </a:r>
+                    </a:p>
+                  </a:txBody>
+                  <a:tcPr marL="0" marR="146304" marT="36576" marB="36576" anchor="ctr">
+                    <a:noFill/>
+                  </a:tcPr>
+                </a:tc>
+              </a:tr>
+              <a:tr h="365760">
+                <a:tc>
+                  <a:txBody>
+                    <a:bodyPr wrap="square"/>
+                    <a:lstStyle/>
+                    <a:p>
+                      <a:r>
+                        <a:rPr sz="1400" b="0" i="0">
+                          <a:solidFill>
+                            <a:srgbClr val="000000"/>
+                          </a:solidFill>
+                          <a:latin typeface="Times New Roman"/>
+                        </a:rPr>
+                        <a:t>Fluency ratio</a:t>
+                      </a:r>
+                    </a:p>
+                  </a:txBody>
+                  <a:tcPr marL="0" marR="146304" marT="36576" marB="36576" anchor="ctr">
+                    <a:noFill/>
+                  </a:tcPr>
+                </a:tc>
+                <a:tc>
+                  <a:txBody>
+                    <a:bodyPr wrap="square"/>
+                    <a:lstStyle/>
+                    <a:p>
+                      <a:r>
+                        <a:rPr sz="1400" b="0" i="0">
+                          <a:solidFill>
+                            <a:srgbClr val="000000"/>
+                          </a:solidFill>
+                          <a:latin typeface="Times New Roman"/>
+                        </a:rPr>
+                        <a:t>≤ 1.5</a:t>
+                      </a:r>
+                    </a:p>
+                  </a:txBody>
+                  <a:tcPr marL="0" marR="146304" marT="36576" marB="36576" anchor="ctr">
+                    <a:noFill/>
+                  </a:tcPr>
+                </a:tc>
+                <a:tc>
+                  <a:txBody>
+                    <a:bodyPr wrap="square"/>
+                    <a:lstStyle/>
+                    <a:p>
+                      <a:r>
+                        <a:rPr sz="1400" b="0" i="0">
+                          <a:solidFill>
+                            <a:srgbClr val="000000"/>
+                          </a:solidFill>
+                          <a:latin typeface="Times New Roman"/>
+                        </a:rPr>
+                        <a:t>frozen 2026-08-08, not yet scorable</a:t>
+                      </a:r>
+                    </a:p>
+                  </a:txBody>
+                  <a:tcPr marL="0" marR="146304" marT="36576" marB="36576" anchor="ctr">
+                    <a:noFill/>
+                  </a:tcPr>
+                </a:tc>
+              </a:tr>
+            </a:tbl>
+          </a:graphicData>
+        </a:graphic>
+      </p:graphicFrame>
     </p:spTree>
   </p:cSld>
   <p:clrMapOvr>
@@ -3682,8 +3838,8 @@
         </p:nvSpPr>
         <p:spPr>
           <a:xfrm>
-            <a:off x="914400" y="658368"/>
-            <a:ext cx="10362895" cy="274320"/>
+            <a:off x="914400" y="566928"/>
+            <a:ext cx="10362895" cy="822960"/>
           </a:xfrm>
           <a:prstGeom prst="rect">
             <a:avLst/>
@@ -3697,81 +3853,42 @@
           <a:lstStyle/>
           <a:p>
             <a:pPr>
-              <a:spcAft>
-                <a:spcPts val="0"/>
-              </a:spcAft>
-            </a:pPr>
-            <a:r>
-              <a:rPr sz="1150" b="1">
-                <a:solidFill>
-                  <a:srgbClr val="1D4E89"/>
-                </a:solidFill>
-                <a:latin typeface="Consolas"/>
-              </a:rPr>
-              <a:t>FINDING 1 · EXPERIMENT 002</a:t>
-            </a:r>
-          </a:p>
-        </p:txBody>
-      </p:sp>
-      <p:sp>
-        <p:nvSpPr>
-          <p:cNvPr id="3" name="TextBox 2"/>
-          <p:cNvSpPr txBox="1"/>
-          <p:nvPr/>
-        </p:nvSpPr>
-        <p:spPr>
-          <a:xfrm>
-            <a:off x="914400" y="987552"/>
-            <a:ext cx="10362895" cy="914400"/>
-          </a:xfrm>
-          <a:prstGeom prst="rect">
-            <a:avLst/>
-          </a:prstGeom>
-          <a:noFill/>
-        </p:spPr>
-        <p:txBody>
-          <a:bodyPr wrap="square" anchor="t" lIns="0" rIns="0" tIns="0" bIns="0">
-            <a:spAutoFit/>
-          </a:bodyPr>
-          <a:lstStyle/>
-          <a:p>
-            <a:pPr>
               <a:lnSpc>
-                <a:spcPct val="105000"/>
+                <a:spcPct val="104000"/>
               </a:lnSpc>
               <a:spcAft>
                 <a:spcPts val="0"/>
               </a:spcAft>
             </a:pPr>
             <a:r>
-              <a:rPr sz="3000" b="1">
+              <a:rPr sz="2800" b="1" i="0">
                 <a:solidFill>
-                  <a:srgbClr val="123045"/>
+                  <a:srgbClr val="000000"/>
                 </a:solidFill>
-                <a:latin typeface="Segoe UI"/>
+                <a:latin typeface="Times New Roman"/>
               </a:rPr>
-              <a:t>The attack does nothing — and the mechanism it attacks is alive</a:t>
+              <a:t>Experiment 002 — scaled-down pilot</a:t>
             </a:r>
           </a:p>
         </p:txBody>
       </p:sp>
       <p:cxnSp>
         <p:nvCxnSpPr>
-          <p:cNvPr id="4" name="Connector 3"/>
+          <p:cNvPr id="3" name="Connector 2"/>
           <p:cNvCxnSpPr/>
           <p:nvPr/>
         </p:nvCxnSpPr>
         <p:spPr>
           <a:xfrm>
-            <a:off x="914400" y="1673351"/>
+            <a:off x="914400" y="1389888"/>
             <a:ext cx="10362895" cy="0"/>
           </a:xfrm>
           <a:prstGeom prst="line">
             <a:avLst/>
           </a:prstGeom>
-          <a:ln w="12700">
+          <a:ln w="9525">
             <a:solidFill>
-              <a:srgbClr val="D3DAE2"/>
+              <a:srgbClr val="000000"/>
             </a:solidFill>
           </a:ln>
         </p:spPr>
@@ -3792,14 +3909,14 @@
       </p:cxnSp>
       <p:sp>
         <p:nvSpPr>
-          <p:cNvPr id="5" name="TextBox 4"/>
+          <p:cNvPr id="4" name="TextBox 3"/>
           <p:cNvSpPr txBox="1"/>
           <p:nvPr/>
         </p:nvSpPr>
         <p:spPr>
           <a:xfrm>
-            <a:off x="914400" y="6291072"/>
-            <a:ext cx="10362895" cy="256032"/>
+            <a:off x="914400" y="6327648"/>
+            <a:ext cx="10362895" cy="237744"/>
           </a:xfrm>
           <a:prstGeom prst="rect">
             <a:avLst/>
@@ -3818,27 +3935,27 @@
               </a:spcAft>
             </a:pPr>
             <a:r>
-              <a:rPr sz="950" b="0">
+              <a:rPr sz="1000" b="0" i="0">
                 <a:solidFill>
-                  <a:srgbClr val="96A1AB"/>
+                  <a:srgbClr val="000000"/>
                 </a:solidFill>
-                <a:latin typeface="Consolas"/>
+                <a:latin typeface="Times New Roman"/>
               </a:rPr>
-              <a:t>Trust-Gated Fast-Weight Updates for TTT-E2E LLMs     ·     2026-09-15     ·     2</a:t>
-            </a:r>
-          </a:p>
-        </p:txBody>
-      </p:sp>
-      <p:sp>
-        <p:nvSpPr>
-          <p:cNvPr id="6" name="TextBox 5"/>
+              <a:t>Trust-Gated Fast-Weight Updates for TTT-E2E LLMs   |   2026-09-15   |   2</a:t>
+            </a:r>
+          </a:p>
+        </p:txBody>
+      </p:sp>
+      <p:sp>
+        <p:nvSpPr>
+          <p:cNvPr id="5" name="TextBox 4"/>
           <p:cNvSpPr txBox="1"/>
           <p:nvPr/>
         </p:nvSpPr>
         <p:spPr>
           <a:xfrm>
-            <a:off x="914400" y="1920239"/>
-            <a:ext cx="10362895" cy="1371600"/>
+            <a:off x="914400" y="1627632"/>
+            <a:ext cx="10058400" cy="3657600"/>
           </a:xfrm>
           <a:prstGeom prst="rect">
             <a:avLst/>
@@ -3852,72 +3969,74 @@
           <a:lstStyle/>
           <a:p>
             <a:pPr>
+              <a:lnSpc>
+                <a:spcPct val="116000"/>
+              </a:lnSpc>
               <a:spcAft>
-                <a:spcPts val="200"/>
+                <a:spcPts val="800"/>
               </a:spcAft>
             </a:pPr>
             <a:r>
-              <a:rPr sz="6600" b="1">
+              <a:rPr sz="1600" b="0">
                 <a:solidFill>
-                  <a:srgbClr val="1D4E89"/>
+                  <a:srgbClr val="000000"/>
                 </a:solidFill>
-                <a:latin typeface="Consolas"/>
+                <a:latin typeface="Times New Roman"/>
               </a:rPr>
-              <a:t>d = -0.003</a:t>
-            </a:r>
-          </a:p>
-        </p:txBody>
-      </p:sp>
-      <p:sp>
-        <p:nvSpPr>
-          <p:cNvPr id="7" name="TextBox 6"/>
-          <p:cNvSpPr txBox="1"/>
-          <p:nvPr/>
-        </p:nvSpPr>
-        <p:spPr>
-          <a:xfrm>
-            <a:off x="914400" y="2944367"/>
-            <a:ext cx="10362895" cy="457200"/>
-          </a:xfrm>
-          <a:prstGeom prst="rect">
-            <a:avLst/>
-          </a:prstGeom>
-          <a:noFill/>
-        </p:spPr>
-        <p:txBody>
-          <a:bodyPr wrap="square" anchor="t" lIns="0" rIns="0" tIns="0" bIns="0">
-            <a:spAutoFit/>
-          </a:bodyPr>
-          <a:lstStyle/>
+              <a:t>—  Victim: ~0.1M-parameter byte-level TTT stand-in. Not TTT-E2E.</a:t>
+            </a:r>
+          </a:p>
           <a:p>
             <a:pPr>
+              <a:lnSpc>
+                <a:spcPct val="116000"/>
+              </a:lnSpc>
               <a:spcAft>
-                <a:spcPts val="0"/>
+                <a:spcPts val="800"/>
               </a:spcAft>
             </a:pPr>
             <a:r>
-              <a:rPr sz="1500" b="0">
+              <a:rPr sz="1600" b="0">
                 <a:solidFill>
-                  <a:srgbClr val="5A6673"/>
+                  <a:srgbClr val="000000"/>
                 </a:solidFill>
-                <a:latin typeface="Segoe UI"/>
+                <a:latin typeface="Times New Roman"/>
               </a:rPr>
-              <a:t>Cohen's d, crafted poison stream vs matched control, 5 seeds. Bar for corruption is d ≥ 0.8.</a:t>
+              <a:t>—  Attacker selects real spans from a benign corpus and chooses their order.</a:t>
+            </a:r>
+          </a:p>
+          <a:p>
+            <a:pPr>
+              <a:lnSpc>
+                <a:spcPct val="116000"/>
+              </a:lnSpc>
+              <a:spcAft>
+                <a:spcPts val="800"/>
+              </a:spcAft>
+            </a:pPr>
+            <a:r>
+              <a:rPr sz="1600" b="0">
+                <a:solidFill>
+                  <a:srgbClr val="000000"/>
+                </a:solidFill>
+                <a:latin typeface="Times New Roman"/>
+              </a:rPr>
+              <a:t>—  Base weights frozen; only the fast MLP is updated, by SGD, once per chunk.</a:t>
             </a:r>
           </a:p>
         </p:txBody>
       </p:sp>
       <p:graphicFrame>
         <p:nvGraphicFramePr>
-          <p:cNvPr id="8" name="Table 7"/>
+          <p:cNvPr id="6" name="Table 5"/>
           <p:cNvGraphicFramePr>
             <a:graphicFrameLocks noGrp="1"/>
           </p:cNvGraphicFramePr>
           <p:nvPr/>
         </p:nvGraphicFramePr>
         <p:xfrm>
-          <a:off x="914400" y="3630167"/>
-          <a:ext cx="10149840" cy="1536192"/>
+          <a:off x="914400" y="2907792"/>
+          <a:ext cx="9875520" cy="1828800"/>
         </p:xfrm>
         <a:graphic>
           <a:graphicData uri="http://schemas.openxmlformats.org/drawingml/2006/table">
@@ -3926,254 +4045,316 @@
                 <a:tableStyleId>{5C22544A-7EE6-4342-B048-85BDC9FD1C3A}</a:tableStyleId>
               </a:tblPr>
               <a:tblGrid>
-                <a:gridCol w="3200400"/>
-                <a:gridCol w="2194560"/>
-                <a:gridCol w="4754880"/>
+                <a:gridCol w="3291840"/>
+                <a:gridCol w="2377440"/>
+                <a:gridCol w="4206240"/>
               </a:tblGrid>
-              <a:tr h="384048">
-                <a:tc>
-                  <a:txBody>
-                    <a:bodyPr wrap="square"/>
-                    <a:lstStyle/>
-                    <a:p>
-                      <a:r>
-                        <a:rPr sz="1200" b="1">
-                          <a:solidFill>
-                            <a:srgbClr val="5A6673"/>
-                          </a:solidFill>
-                          <a:latin typeface="Segoe UI"/>
-                        </a:rPr>
-                        <a:t/>
-                      </a:r>
-                    </a:p>
-                  </a:txBody>
-                  <a:tcPr marL="0" marR="128016" marT="41148" marB="41148" anchor="ctr">
-                    <a:noFill/>
-                  </a:tcPr>
-                </a:tc>
-                <a:tc>
-                  <a:txBody>
-                    <a:bodyPr wrap="square"/>
-                    <a:lstStyle/>
-                    <a:p>
-                      <a:r>
-                        <a:rPr sz="1200" b="1">
-                          <a:solidFill>
-                            <a:srgbClr val="5A6673"/>
-                          </a:solidFill>
-                          <a:latin typeface="Segoe UI"/>
+              <a:tr h="365760">
+                <a:tc>
+                  <a:txBody>
+                    <a:bodyPr wrap="square"/>
+                    <a:lstStyle/>
+                    <a:p>
+                      <a:r>
+                        <a:rPr sz="1400" b="1" i="1">
+                          <a:solidFill>
+                            <a:srgbClr val="000000"/>
+                          </a:solidFill>
+                          <a:latin typeface="Times New Roman"/>
+                        </a:rPr>
+                        <a:t>Measurement</a:t>
+                      </a:r>
+                    </a:p>
+                  </a:txBody>
+                  <a:tcPr marL="0" marR="146304" marT="36576" marB="36576" anchor="ctr">
+                    <a:noFill/>
+                  </a:tcPr>
+                </a:tc>
+                <a:tc>
+                  <a:txBody>
+                    <a:bodyPr wrap="square"/>
+                    <a:lstStyle/>
+                    <a:p>
+                      <a:r>
+                        <a:rPr sz="1400" b="1" i="1">
+                          <a:solidFill>
+                            <a:srgbClr val="000000"/>
+                          </a:solidFill>
+                          <a:latin typeface="Times New Roman"/>
                         </a:rPr>
                         <a:t>Observed</a:t>
                       </a:r>
                     </a:p>
                   </a:txBody>
-                  <a:tcPr marL="0" marR="128016" marT="41148" marB="41148" anchor="ctr">
-                    <a:noFill/>
-                  </a:tcPr>
-                </a:tc>
-                <a:tc>
-                  <a:txBody>
-                    <a:bodyPr wrap="square"/>
-                    <a:lstStyle/>
-                    <a:p>
-                      <a:r>
-                        <a:rPr sz="1200" b="1">
-                          <a:solidFill>
-                            <a:srgbClr val="5A6673"/>
-                          </a:solidFill>
-                          <a:latin typeface="Segoe UI"/>
-                        </a:rPr>
-                        <a:t>Reads as</a:t>
-                      </a:r>
-                    </a:p>
-                  </a:txBody>
-                  <a:tcPr marL="0" marR="128016" marT="41148" marB="41148" anchor="ctr">
+                  <a:tcPr marL="0" marR="146304" marT="36576" marB="36576" anchor="ctr">
+                    <a:noFill/>
+                  </a:tcPr>
+                </a:tc>
+                <a:tc>
+                  <a:txBody>
+                    <a:bodyPr wrap="square"/>
+                    <a:lstStyle/>
+                    <a:p>
+                      <a:r>
+                        <a:rPr sz="1400" b="1" i="1">
+                          <a:solidFill>
+                            <a:srgbClr val="000000"/>
+                          </a:solidFill>
+                          <a:latin typeface="Times New Roman"/>
+                        </a:rPr>
+                        <a:t>Bar</a:t>
+                      </a:r>
+                    </a:p>
+                  </a:txBody>
+                  <a:tcPr marL="0" marR="146304" marT="36576" marB="36576" anchor="ctr">
                     <a:noFill/>
                   </a:tcPr>
                 </a:tc>
               </a:tr>
-              <a:tr h="384048">
-                <a:tc>
-                  <a:txBody>
-                    <a:bodyPr wrap="square"/>
-                    <a:lstStyle/>
-                    <a:p>
-                      <a:r>
-                        <a:rPr sz="1300" b="0">
-                          <a:solidFill>
-                            <a:srgbClr val="10151C"/>
-                          </a:solidFill>
-                          <a:latin typeface="Segoe UI"/>
-                        </a:rPr>
-                        <a:t>Attack effect size</a:t>
-                      </a:r>
-                    </a:p>
-                  </a:txBody>
-                  <a:tcPr marL="0" marR="128016" marT="41148" marB="41148" anchor="ctr">
-                    <a:noFill/>
-                  </a:tcPr>
-                </a:tc>
-                <a:tc>
-                  <a:txBody>
-                    <a:bodyPr wrap="square"/>
-                    <a:lstStyle/>
-                    <a:p>
-                      <a:r>
-                        <a:rPr sz="1300" b="0">
-                          <a:solidFill>
-                            <a:srgbClr val="10151C"/>
-                          </a:solidFill>
-                          <a:latin typeface="Consolas"/>
+              <a:tr h="365760">
+                <a:tc>
+                  <a:txBody>
+                    <a:bodyPr wrap="square"/>
+                    <a:lstStyle/>
+                    <a:p>
+                      <a:r>
+                        <a:rPr sz="1400" b="0" i="0">
+                          <a:solidFill>
+                            <a:srgbClr val="000000"/>
+                          </a:solidFill>
+                          <a:latin typeface="Times New Roman"/>
+                        </a:rPr>
+                        <a:t>Effect size (Cohen's d)</a:t>
+                      </a:r>
+                    </a:p>
+                  </a:txBody>
+                  <a:tcPr marL="0" marR="146304" marT="36576" marB="36576" anchor="ctr">
+                    <a:noFill/>
+                  </a:tcPr>
+                </a:tc>
+                <a:tc>
+                  <a:txBody>
+                    <a:bodyPr wrap="square"/>
+                    <a:lstStyle/>
+                    <a:p>
+                      <a:r>
+                        <a:rPr sz="1400" b="0" i="0">
+                          <a:solidFill>
+                            <a:srgbClr val="000000"/>
+                          </a:solidFill>
+                          <a:latin typeface="Times New Roman"/>
                         </a:rPr>
                         <a:t>-0.003</a:t>
                       </a:r>
                     </a:p>
                   </a:txBody>
-                  <a:tcPr marL="0" marR="128016" marT="41148" marB="41148" anchor="ctr">
-                    <a:noFill/>
-                  </a:tcPr>
-                </a:tc>
-                <a:tc>
-                  <a:txBody>
-                    <a:bodyPr wrap="square"/>
-                    <a:lstStyle/>
-                    <a:p>
-                      <a:r>
-                        <a:rPr sz="1300" b="0">
-                          <a:solidFill>
-                            <a:srgbClr val="10151C"/>
-                          </a:solidFill>
-                          <a:latin typeface="Consolas"/>
-                        </a:rPr>
-                        <a:t>0th percentile of its own null</a:t>
-                      </a:r>
-                    </a:p>
-                  </a:txBody>
-                  <a:tcPr marL="0" marR="128016" marT="41148" marB="41148" anchor="ctr">
+                  <a:tcPr marL="0" marR="146304" marT="36576" marB="36576" anchor="ctr">
+                    <a:noFill/>
+                  </a:tcPr>
+                </a:tc>
+                <a:tc>
+                  <a:txBody>
+                    <a:bodyPr wrap="square"/>
+                    <a:lstStyle/>
+                    <a:p>
+                      <a:r>
+                        <a:rPr sz="1400" b="0" i="0">
+                          <a:solidFill>
+                            <a:srgbClr val="000000"/>
+                          </a:solidFill>
+                          <a:latin typeface="Times New Roman"/>
+                        </a:rPr>
+                        <a:t>≥ 0.80</a:t>
+                      </a:r>
+                    </a:p>
+                  </a:txBody>
+                  <a:tcPr marL="0" marR="146304" marT="36576" marB="36576" anchor="ctr">
                     <a:noFill/>
                   </a:tcPr>
                 </a:tc>
               </a:tr>
-              <a:tr h="384048">
-                <a:tc>
-                  <a:txBody>
-                    <a:bodyPr wrap="square"/>
-                    <a:lstStyle/>
-                    <a:p>
-                      <a:r>
-                        <a:rPr sz="1300" b="0">
-                          <a:solidFill>
-                            <a:srgbClr val="10151C"/>
-                          </a:solidFill>
-                          <a:latin typeface="Segoe UI"/>
+              <a:tr h="365760">
+                <a:tc>
+                  <a:txBody>
+                    <a:bodyPr wrap="square"/>
+                    <a:lstStyle/>
+                    <a:p>
+                      <a:r>
+                        <a:rPr sz="1400" b="0" i="0">
+                          <a:solidFill>
+                            <a:srgbClr val="000000"/>
+                          </a:solidFill>
+                          <a:latin typeface="Times New Roman"/>
                         </a:rPr>
                         <a:t>Relative degradation</a:t>
                       </a:r>
                     </a:p>
                   </a:txBody>
-                  <a:tcPr marL="0" marR="128016" marT="41148" marB="41148" anchor="ctr">
-                    <a:noFill/>
-                  </a:tcPr>
-                </a:tc>
-                <a:tc>
-                  <a:txBody>
-                    <a:bodyPr wrap="square"/>
-                    <a:lstStyle/>
-                    <a:p>
-                      <a:r>
-                        <a:rPr sz="1300" b="0">
-                          <a:solidFill>
-                            <a:srgbClr val="10151C"/>
-                          </a:solidFill>
-                          <a:latin typeface="Consolas"/>
+                  <a:tcPr marL="0" marR="146304" marT="36576" marB="36576" anchor="ctr">
+                    <a:noFill/>
+                  </a:tcPr>
+                </a:tc>
+                <a:tc>
+                  <a:txBody>
+                    <a:bodyPr wrap="square"/>
+                    <a:lstStyle/>
+                    <a:p>
+                      <a:r>
+                        <a:rPr sz="1400" b="0" i="0">
+                          <a:solidFill>
+                            <a:srgbClr val="000000"/>
+                          </a:solidFill>
+                          <a:latin typeface="Times New Roman"/>
                         </a:rPr>
                         <a:t>-0.0012%</a:t>
                       </a:r>
                     </a:p>
                   </a:txBody>
-                  <a:tcPr marL="0" marR="128016" marT="41148" marB="41148" anchor="ctr">
-                    <a:noFill/>
-                  </a:tcPr>
-                </a:tc>
-                <a:tc>
-                  <a:txBody>
-                    <a:bodyPr wrap="square"/>
-                    <a:lstStyle/>
-                    <a:p>
-                      <a:r>
-                        <a:rPr sz="1300" b="0">
-                          <a:solidFill>
-                            <a:srgbClr val="10151C"/>
-                          </a:solidFill>
-                          <a:latin typeface="Segoe UI"/>
-                        </a:rPr>
-                        <a:t>bar is 10%</a:t>
-                      </a:r>
-                    </a:p>
-                  </a:txBody>
-                  <a:tcPr marL="0" marR="128016" marT="41148" marB="41148" anchor="ctr">
+                  <a:tcPr marL="0" marR="146304" marT="36576" marB="36576" anchor="ctr">
+                    <a:noFill/>
+                  </a:tcPr>
+                </a:tc>
+                <a:tc>
+                  <a:txBody>
+                    <a:bodyPr wrap="square"/>
+                    <a:lstStyle/>
+                    <a:p>
+                      <a:r>
+                        <a:rPr sz="1400" b="0" i="0">
+                          <a:solidFill>
+                            <a:srgbClr val="000000"/>
+                          </a:solidFill>
+                          <a:latin typeface="Times New Roman"/>
+                        </a:rPr>
+                        <a:t>≥ 10%</a:t>
+                      </a:r>
+                    </a:p>
+                  </a:txBody>
+                  <a:tcPr marL="0" marR="146304" marT="36576" marB="36576" anchor="ctr">
                     <a:noFill/>
                   </a:tcPr>
                 </a:tc>
               </a:tr>
-              <a:tr h="384048">
-                <a:tc>
-                  <a:txBody>
-                    <a:bodyPr wrap="square"/>
-                    <a:lstStyle/>
-                    <a:p>
-                      <a:r>
-                        <a:rPr sz="1300" b="0">
-                          <a:solidFill>
-                            <a:srgbClr val="10151C"/>
-                          </a:solidFill>
-                          <a:latin typeface="Segoe UI"/>
+              <a:tr h="365760">
+                <a:tc>
+                  <a:txBody>
+                    <a:bodyPr wrap="square"/>
+                    <a:lstStyle/>
+                    <a:p>
+                      <a:r>
+                        <a:rPr sz="1400" b="0" i="0">
+                          <a:solidFill>
+                            <a:srgbClr val="000000"/>
+                          </a:solidFill>
+                          <a:latin typeface="Times New Roman"/>
                         </a:rPr>
                         <a:t>Inner-loop adaptation</a:t>
                       </a:r>
                     </a:p>
                   </a:txBody>
-                  <a:tcPr marL="0" marR="128016" marT="41148" marB="41148" anchor="ctr">
-                    <a:noFill/>
-                  </a:tcPr>
-                </a:tc>
-                <a:tc>
-                  <a:txBody>
-                    <a:bodyPr wrap="square"/>
-                    <a:lstStyle/>
-                    <a:p>
-                      <a:r>
-                        <a:rPr sz="1300" b="0">
-                          <a:solidFill>
-                            <a:srgbClr val="10151C"/>
-                          </a:solidFill>
-                          <a:latin typeface="Consolas"/>
+                  <a:tcPr marL="0" marR="146304" marT="36576" marB="36576" anchor="ctr">
+                    <a:noFill/>
+                  </a:tcPr>
+                </a:tc>
+                <a:tc>
+                  <a:txBody>
+                    <a:bodyPr wrap="square"/>
+                    <a:lstStyle/>
+                    <a:p>
+                      <a:r>
+                        <a:rPr sz="1400" b="0" i="0">
+                          <a:solidFill>
+                            <a:srgbClr val="000000"/>
+                          </a:solidFill>
+                          <a:latin typeface="Times New Roman"/>
                         </a:rPr>
                         <a:t>0.1532 nats</a:t>
                       </a:r>
                     </a:p>
                   </a:txBody>
-                  <a:tcPr marL="0" marR="128016" marT="41148" marB="41148" anchor="ctr">
-                    <a:noFill/>
-                  </a:tcPr>
-                </a:tc>
-                <a:tc>
-                  <a:txBody>
-                    <a:bodyPr wrap="square"/>
-                    <a:lstStyle/>
-                    <a:p>
-                      <a:r>
-                        <a:rPr sz="1300" b="0">
-                          <a:solidFill>
-                            <a:srgbClr val="10151C"/>
-                          </a:solidFill>
-                          <a:latin typeface="Segoe UI"/>
-                        </a:rPr>
-                        <a:t>vs 0.0007 shallow — the fast weights do move</a:t>
-                      </a:r>
-                    </a:p>
-                  </a:txBody>
-                  <a:tcPr marL="0" marR="128016" marT="41148" marB="41148" anchor="ctr">
+                  <a:tcPr marL="0" marR="146304" marT="36576" marB="36576" anchor="ctr">
+                    <a:noFill/>
+                  </a:tcPr>
+                </a:tc>
+                <a:tc>
+                  <a:txBody>
+                    <a:bodyPr wrap="square"/>
+                    <a:lstStyle/>
+                    <a:p>
+                      <a:r>
+                        <a:rPr sz="1400" b="0" i="0">
+                          <a:solidFill>
+                            <a:srgbClr val="000000"/>
+                          </a:solidFill>
+                          <a:latin typeface="Times New Roman"/>
+                        </a:rPr>
+                        <a:t>vs 0.0007 with shallow base</a:t>
+                      </a:r>
+                    </a:p>
+                  </a:txBody>
+                  <a:tcPr marL="0" marR="146304" marT="36576" marB="36576" anchor="ctr">
+                    <a:noFill/>
+                  </a:tcPr>
+                </a:tc>
+              </a:tr>
+              <a:tr h="365760">
+                <a:tc>
+                  <a:txBody>
+                    <a:bodyPr wrap="square"/>
+                    <a:lstStyle/>
+                    <a:p>
+                      <a:r>
+                        <a:rPr sz="1400" b="0" i="0">
+                          <a:solidFill>
+                            <a:srgbClr val="000000"/>
+                          </a:solidFill>
+                          <a:latin typeface="Times New Roman"/>
+                        </a:rPr>
+                        <a:t>Position in own null</a:t>
+                      </a:r>
+                    </a:p>
+                  </a:txBody>
+                  <a:tcPr marL="0" marR="146304" marT="36576" marB="36576" anchor="ctr">
+                    <a:noFill/>
+                  </a:tcPr>
+                </a:tc>
+                <a:tc>
+                  <a:txBody>
+                    <a:bodyPr wrap="square"/>
+                    <a:lstStyle/>
+                    <a:p>
+                      <a:r>
+                        <a:rPr sz="1400" b="0" i="0">
+                          <a:solidFill>
+                            <a:srgbClr val="000000"/>
+                          </a:solidFill>
+                          <a:latin typeface="Times New Roman"/>
+                        </a:rPr>
+                        <a:t>0th percentile</a:t>
+                      </a:r>
+                    </a:p>
+                  </a:txBody>
+                  <a:tcPr marL="0" marR="146304" marT="36576" marB="36576" anchor="ctr">
+                    <a:noFill/>
+                  </a:tcPr>
+                </a:tc>
+                <a:tc>
+                  <a:txBody>
+                    <a:bodyPr wrap="square"/>
+                    <a:lstStyle/>
+                    <a:p>
+                      <a:r>
+                        <a:rPr sz="1400" b="0" i="0">
+                          <a:solidFill>
+                            <a:srgbClr val="000000"/>
+                          </a:solidFill>
+                          <a:latin typeface="Times New Roman"/>
+                        </a:rPr>
+                        <a:t>—</a:t>
+                      </a:r>
+                    </a:p>
+                  </a:txBody>
+                  <a:tcPr marL="0" marR="146304" marT="36576" marB="36576" anchor="ctr">
                     <a:noFill/>
                   </a:tcPr>
                 </a:tc>
@@ -4184,14 +4365,14 @@
       </p:graphicFrame>
       <p:sp>
         <p:nvSpPr>
-          <p:cNvPr id="9" name="TextBox 8"/>
+          <p:cNvPr id="7" name="TextBox 6"/>
           <p:cNvSpPr txBox="1"/>
           <p:nvPr/>
         </p:nvSpPr>
         <p:spPr>
           <a:xfrm>
-            <a:off x="914400" y="5394959"/>
-            <a:ext cx="9692640" cy="822960"/>
+            <a:off x="914400" y="4937760"/>
+            <a:ext cx="10058400" cy="822960"/>
           </a:xfrm>
           <a:prstGeom prst="rect">
             <a:avLst/>
@@ -4206,20 +4387,20 @@
           <a:p>
             <a:pPr>
               <a:lnSpc>
-                <a:spcPct val="135000"/>
+                <a:spcPct val="130000"/>
               </a:lnSpc>
               <a:spcAft>
                 <a:spcPts val="0"/>
               </a:spcAft>
             </a:pPr>
             <a:r>
-              <a:rPr sz="1250" b="0">
+              <a:rPr sz="1250" b="0" i="1">
                 <a:solidFill>
-                  <a:srgbClr val="5A6673"/>
+                  <a:srgbClr val="000000"/>
                 </a:solidFill>
-                <a:latin typeface="Consolas"/>
+                <a:latin typeface="Times New Roman"/>
               </a:rPr>
-              <a:t>A null from a working mechanism. Not a null because nothing was adapting.</a:t>
+              <a:t>The attack moves benign loss by nothing. The mechanism it attacks measurably adapts, so this is a null from a working inner loop.</a:t>
             </a:r>
           </a:p>
         </p:txBody>
@@ -4258,8 +4439,8 @@
         </p:nvSpPr>
         <p:spPr>
           <a:xfrm>
-            <a:off x="914400" y="658368"/>
-            <a:ext cx="10362895" cy="274320"/>
+            <a:off x="914400" y="566928"/>
+            <a:ext cx="10362895" cy="822960"/>
           </a:xfrm>
           <a:prstGeom prst="rect">
             <a:avLst/>
@@ -4273,81 +4454,42 @@
           <a:lstStyle/>
           <a:p>
             <a:pPr>
-              <a:spcAft>
-                <a:spcPts val="0"/>
-              </a:spcAft>
-            </a:pPr>
-            <a:r>
-              <a:rPr sz="1150" b="1">
-                <a:solidFill>
-                  <a:srgbClr val="1D4E89"/>
-                </a:solidFill>
-                <a:latin typeface="Consolas"/>
-              </a:rPr>
-              <a:t>FINDING 2 · THE INSTRUMENT</a:t>
-            </a:r>
-          </a:p>
-        </p:txBody>
-      </p:sp>
-      <p:sp>
-        <p:nvSpPr>
-          <p:cNvPr id="3" name="TextBox 2"/>
-          <p:cNvSpPr txBox="1"/>
-          <p:nvPr/>
-        </p:nvSpPr>
-        <p:spPr>
-          <a:xfrm>
-            <a:off x="914400" y="987552"/>
-            <a:ext cx="10362895" cy="914400"/>
-          </a:xfrm>
-          <a:prstGeom prst="rect">
-            <a:avLst/>
-          </a:prstGeom>
-          <a:noFill/>
-        </p:spPr>
-        <p:txBody>
-          <a:bodyPr wrap="square" anchor="t" lIns="0" rIns="0" tIns="0" bIns="0">
-            <a:spAutoFit/>
-          </a:bodyPr>
-          <a:lstStyle/>
-          <a:p>
-            <a:pPr>
               <a:lnSpc>
-                <a:spcPct val="105000"/>
+                <a:spcPct val="104000"/>
               </a:lnSpc>
               <a:spcAft>
                 <a:spcPts val="0"/>
               </a:spcAft>
             </a:pPr>
             <a:r>
-              <a:rPr sz="3000" b="1">
+              <a:rPr sz="2800" b="1" i="0">
                 <a:solidFill>
-                  <a:srgbClr val="123045"/>
+                  <a:srgbClr val="000000"/>
                 </a:solidFill>
-                <a:latin typeface="Segoe UI"/>
+                <a:latin typeface="Times New Roman"/>
               </a:rPr>
-              <a:t>At five seeds, the criterion fires without an attacker</a:t>
+              <a:t>Experiment 002 — null distribution</a:t>
             </a:r>
           </a:p>
         </p:txBody>
       </p:sp>
       <p:cxnSp>
         <p:nvCxnSpPr>
-          <p:cNvPr id="4" name="Connector 3"/>
+          <p:cNvPr id="3" name="Connector 2"/>
           <p:cNvCxnSpPr/>
           <p:nvPr/>
         </p:nvCxnSpPr>
         <p:spPr>
           <a:xfrm>
-            <a:off x="914400" y="1673351"/>
+            <a:off x="914400" y="1389888"/>
             <a:ext cx="10362895" cy="0"/>
           </a:xfrm>
           <a:prstGeom prst="line">
             <a:avLst/>
           </a:prstGeom>
-          <a:ln w="12700">
+          <a:ln w="9525">
             <a:solidFill>
-              <a:srgbClr val="D3DAE2"/>
+              <a:srgbClr val="000000"/>
             </a:solidFill>
           </a:ln>
         </p:spPr>
@@ -4368,14 +4510,14 @@
       </p:cxnSp>
       <p:sp>
         <p:nvSpPr>
-          <p:cNvPr id="5" name="TextBox 4"/>
+          <p:cNvPr id="4" name="TextBox 3"/>
           <p:cNvSpPr txBox="1"/>
           <p:nvPr/>
         </p:nvSpPr>
         <p:spPr>
           <a:xfrm>
-            <a:off x="914400" y="6291072"/>
-            <a:ext cx="10362895" cy="256032"/>
+            <a:off x="914400" y="6327648"/>
+            <a:ext cx="10362895" cy="237744"/>
           </a:xfrm>
           <a:prstGeom prst="rect">
             <a:avLst/>
@@ -4394,20 +4536,20 @@
               </a:spcAft>
             </a:pPr>
             <a:r>
-              <a:rPr sz="950" b="0">
+              <a:rPr sz="1000" b="0" i="0">
                 <a:solidFill>
-                  <a:srgbClr val="96A1AB"/>
+                  <a:srgbClr val="000000"/>
                 </a:solidFill>
-                <a:latin typeface="Consolas"/>
+                <a:latin typeface="Times New Roman"/>
               </a:rPr>
-              <a:t>Trust-Gated Fast-Weight Updates for TTT-E2E LLMs     ·     2026-09-15     ·     3</a:t>
+              <a:t>Trust-Gated Fast-Weight Updates for TTT-E2E LLMs   |   2026-09-15   |   3</a:t>
             </a:r>
           </a:p>
         </p:txBody>
       </p:sp>
       <p:pic>
         <p:nvPicPr>
-          <p:cNvPr id="6" name="Picture 5" descr="null_distribution.png"/>
+          <p:cNvPr id="5" name="Picture 4" descr="null_distribution.png"/>
           <p:cNvPicPr>
             <a:picLocks noChangeAspect="1"/>
           </p:cNvPicPr>
@@ -4421,8 +4563,8 @@
         </p:blipFill>
         <p:spPr>
           <a:xfrm>
-            <a:off x="1417659" y="1892807"/>
-            <a:ext cx="9356377" cy="2788920"/>
+            <a:off x="1340967" y="1627632"/>
+            <a:ext cx="9509760" cy="2697480"/>
           </a:xfrm>
           <a:prstGeom prst="rect">
             <a:avLst/>
@@ -4431,14 +4573,14 @@
       </p:pic>
       <p:sp>
         <p:nvSpPr>
-          <p:cNvPr id="7" name="TextBox 6"/>
+          <p:cNvPr id="6" name="TextBox 5"/>
           <p:cNvSpPr txBox="1"/>
           <p:nvPr/>
         </p:nvSpPr>
         <p:spPr>
           <a:xfrm>
-            <a:off x="914400" y="4956047"/>
-            <a:ext cx="9692640" cy="3108960"/>
+            <a:off x="914400" y="4562856"/>
+            <a:ext cx="10058400" cy="1636776"/>
           </a:xfrm>
           <a:prstGeom prst="rect">
             <a:avLst/>
@@ -4453,57 +4595,58 @@
           <a:p>
             <a:pPr>
               <a:lnSpc>
-                <a:spcPct val="122000"/>
+                <a:spcPct val="116000"/>
               </a:lnSpc>
               <a:spcAft>
-                <a:spcPts val="1500"/>
+                <a:spcPts val="700"/>
               </a:spcAft>
             </a:pPr>
             <a:r>
-              <a:rPr sz="1500" b="1">
+              <a:rPr sz="1550" b="0">
                 <a:solidFill>
-                  <a:srgbClr val="10151C"/>
+                  <a:srgbClr val="000000"/>
                 </a:solidFill>
-                <a:latin typeface="Segoe UI"/>
+                <a:latin typeface="Times New Roman"/>
               </a:rPr>
-              <a:t>3 of 20 null draws clear |d| ≥ 0.8.</a:t>
-            </a:r>
-            <a:r>
-              <a:rPr sz="1500">
-                <a:solidFill>
-                  <a:srgbClr val="5A6673"/>
-                </a:solidFill>
-                <a:latin typeface="Segoe UI"/>
-              </a:rPr>
-              <a:t>  False-positive rate 15%. Median |d| 0.362, max 1.307.</a:t>
+              <a:t>—  3 of 20 control-vs-control draws clear |d| ≥ 0.80. False-positive rate 15%.</a:t>
             </a:r>
           </a:p>
           <a:p>
             <a:pPr>
               <a:lnSpc>
-                <a:spcPct val="122000"/>
+                <a:spcPct val="116000"/>
               </a:lnSpc>
               <a:spcAft>
-                <a:spcPts val="1500"/>
+                <a:spcPts val="700"/>
               </a:spcAft>
             </a:pPr>
             <a:r>
-              <a:rPr sz="1500" b="1">
+              <a:rPr sz="1550" b="0">
                 <a:solidFill>
-                  <a:srgbClr val="10151C"/>
+                  <a:srgbClr val="000000"/>
                 </a:solidFill>
-                <a:latin typeface="Segoe UI"/>
+                <a:latin typeface="Times New Roman"/>
               </a:rPr>
-              <a:t>In the shallow pilot the noise floor exceeded the effect.</a:t>
-            </a:r>
-            <a:r>
-              <a:rPr sz="1500">
+              <a:t>—  Median |d| 0.362, max 1.307, 5 seeds per draw.</a:t>
+            </a:r>
+          </a:p>
+          <a:p>
+            <a:pPr>
+              <a:lnSpc>
+                <a:spcPct val="116000"/>
+              </a:lnSpc>
+              <a:spcAft>
+                <a:spcPts val="700"/>
+              </a:spcAft>
+            </a:pPr>
+            <a:r>
+              <a:rPr sz="1550" b="0">
                 <a:solidFill>
-                  <a:srgbClr val="5A6673"/>
+                  <a:srgbClr val="000000"/>
                 </a:solidFill>
-                <a:latin typeface="Segoe UI"/>
+                <a:latin typeface="Times New Roman"/>
               </a:rPr>
-              <a:t>  d = 0.872 poison-vs-control, 0.964 control-vs-control, same run.</a:t>
+              <a:t>—  Shallow pilot, same run: d = 0.872 poison-vs-control, 0.964 control-vs-control.</a:t>
             </a:r>
           </a:p>
         </p:txBody>
@@ -4542,8 +4685,8 @@
         </p:nvSpPr>
         <p:spPr>
           <a:xfrm>
-            <a:off x="914400" y="658368"/>
-            <a:ext cx="10362895" cy="274320"/>
+            <a:off x="914400" y="566928"/>
+            <a:ext cx="10362895" cy="822960"/>
           </a:xfrm>
           <a:prstGeom prst="rect">
             <a:avLst/>
@@ -4557,81 +4700,42 @@
           <a:lstStyle/>
           <a:p>
             <a:pPr>
-              <a:spcAft>
-                <a:spcPts val="0"/>
-              </a:spcAft>
-            </a:pPr>
-            <a:r>
-              <a:rPr sz="1150" b="1">
-                <a:solidFill>
-                  <a:srgbClr val="1D4E89"/>
-                </a:solidFill>
-                <a:latin typeface="Consolas"/>
-              </a:rPr>
-              <a:t>FINDING 3 · METHODS</a:t>
-            </a:r>
-          </a:p>
-        </p:txBody>
-      </p:sp>
-      <p:sp>
-        <p:nvSpPr>
-          <p:cNvPr id="3" name="TextBox 2"/>
-          <p:cNvSpPr txBox="1"/>
-          <p:nvPr/>
-        </p:nvSpPr>
-        <p:spPr>
-          <a:xfrm>
-            <a:off x="914400" y="987552"/>
-            <a:ext cx="10362895" cy="914400"/>
-          </a:xfrm>
-          <a:prstGeom prst="rect">
-            <a:avLst/>
-          </a:prstGeom>
-          <a:noFill/>
-        </p:spPr>
-        <p:txBody>
-          <a:bodyPr wrap="square" anchor="t" lIns="0" rIns="0" tIns="0" bIns="0">
-            <a:spAutoFit/>
-          </a:bodyPr>
-          <a:lstStyle/>
-          <a:p>
-            <a:pPr>
               <a:lnSpc>
-                <a:spcPct val="105000"/>
+                <a:spcPct val="104000"/>
               </a:lnSpc>
               <a:spcAft>
                 <a:spcPts val="0"/>
               </a:spcAft>
             </a:pPr>
             <a:r>
-              <a:rPr sz="3000" b="1">
+              <a:rPr sz="2800" b="1" i="0">
                 <a:solidFill>
-                  <a:srgbClr val="123045"/>
+                  <a:srgbClr val="000000"/>
                 </a:solidFill>
-                <a:latin typeface="Segoe UI"/>
+                <a:latin typeface="Times New Roman"/>
               </a:rPr>
-              <a:t>The pilot had been training on this repository's own documentation</a:t>
+              <a:t>Reproducibility defect — found and fixed</a:t>
             </a:r>
           </a:p>
         </p:txBody>
       </p:sp>
       <p:cxnSp>
         <p:nvCxnSpPr>
-          <p:cNvPr id="4" name="Connector 3"/>
+          <p:cNvPr id="3" name="Connector 2"/>
           <p:cNvCxnSpPr/>
           <p:nvPr/>
         </p:nvCxnSpPr>
         <p:spPr>
           <a:xfrm>
-            <a:off x="914400" y="1673351"/>
+            <a:off x="914400" y="1389888"/>
             <a:ext cx="10362895" cy="0"/>
           </a:xfrm>
           <a:prstGeom prst="line">
             <a:avLst/>
           </a:prstGeom>
-          <a:ln w="12700">
+          <a:ln w="9525">
             <a:solidFill>
-              <a:srgbClr val="D3DAE2"/>
+              <a:srgbClr val="000000"/>
             </a:solidFill>
           </a:ln>
         </p:spPr>
@@ -4652,14 +4756,14 @@
       </p:cxnSp>
       <p:sp>
         <p:nvSpPr>
-          <p:cNvPr id="5" name="TextBox 4"/>
+          <p:cNvPr id="4" name="TextBox 3"/>
           <p:cNvSpPr txBox="1"/>
           <p:nvPr/>
         </p:nvSpPr>
         <p:spPr>
           <a:xfrm>
-            <a:off x="914400" y="6291072"/>
-            <a:ext cx="10362895" cy="256032"/>
+            <a:off x="914400" y="6327648"/>
+            <a:ext cx="10362895" cy="237744"/>
           </a:xfrm>
           <a:prstGeom prst="rect">
             <a:avLst/>
@@ -4678,27 +4782,27 @@
               </a:spcAft>
             </a:pPr>
             <a:r>
-              <a:rPr sz="950" b="0">
+              <a:rPr sz="1000" b="0" i="0">
                 <a:solidFill>
-                  <a:srgbClr val="96A1AB"/>
+                  <a:srgbClr val="000000"/>
                 </a:solidFill>
-                <a:latin typeface="Consolas"/>
+                <a:latin typeface="Times New Roman"/>
               </a:rPr>
-              <a:t>Trust-Gated Fast-Weight Updates for TTT-E2E LLMs     ·     2026-09-15     ·     4</a:t>
-            </a:r>
-          </a:p>
-        </p:txBody>
-      </p:sp>
-      <p:sp>
-        <p:nvSpPr>
-          <p:cNvPr id="6" name="TextBox 5"/>
+              <a:t>Trust-Gated Fast-Weight Updates for TTT-E2E LLMs   |   2026-09-15   |   4</a:t>
+            </a:r>
+          </a:p>
+        </p:txBody>
+      </p:sp>
+      <p:sp>
+        <p:nvSpPr>
+          <p:cNvPr id="5" name="TextBox 4"/>
           <p:cNvSpPr txBox="1"/>
           <p:nvPr/>
         </p:nvSpPr>
         <p:spPr>
           <a:xfrm>
-            <a:off x="914400" y="1874519"/>
-            <a:ext cx="9326880" cy="1188720"/>
+            <a:off x="914400" y="1627632"/>
+            <a:ext cx="10058400" cy="3657600"/>
           </a:xfrm>
           <a:prstGeom prst="rect">
             <a:avLst/>
@@ -4713,35 +4817,54 @@
           <a:p>
             <a:pPr>
               <a:lnSpc>
-                <a:spcPct val="128000"/>
+                <a:spcPct val="116000"/>
               </a:lnSpc>
               <a:spcAft>
-                <a:spcPts val="0"/>
+                <a:spcPts val="800"/>
               </a:spcAft>
             </a:pPr>
             <a:r>
-              <a:rPr sz="1800" b="0">
+              <a:rPr sz="1600" b="0">
                 <a:solidFill>
-                  <a:srgbClr val="5A6673"/>
+                  <a:srgbClr val="000000"/>
                 </a:solidFill>
-                <a:latin typeface="Segoe UI"/>
+                <a:latin typeface="Times New Roman"/>
               </a:rPr>
-              <a:t>Its corpus loader globbed docs/**/*.md and experiments/**/*.md at run time. Every commit touching a markdown file silently changed the experiment.</a:t>
+              <a:t>—  The pilot's corpus was a live glob of this repository's own markdown, resolved at run time.</a:t>
+            </a:r>
+          </a:p>
+          <a:p>
+            <a:pPr>
+              <a:lnSpc>
+                <a:spcPct val="116000"/>
+              </a:lnSpc>
+              <a:spcAft>
+                <a:spcPts val="800"/>
+              </a:spcAft>
+            </a:pPr>
+            <a:r>
+              <a:rPr sz="1600" b="0">
+                <a:solidFill>
+                  <a:srgbClr val="000000"/>
+                </a:solidFill>
+                <a:latin typeface="Times New Roman"/>
+              </a:rPr>
+              <a:t>—  Every commit touching a .md file changed the experiment.</a:t>
             </a:r>
           </a:p>
         </p:txBody>
       </p:sp>
       <p:graphicFrame>
         <p:nvGraphicFramePr>
-          <p:cNvPr id="7" name="Table 6"/>
+          <p:cNvPr id="6" name="Table 5"/>
           <p:cNvGraphicFramePr>
             <a:graphicFrameLocks noGrp="1"/>
           </p:cNvGraphicFramePr>
           <p:nvPr/>
         </p:nvGraphicFramePr>
         <p:xfrm>
-          <a:off x="914400" y="2971799"/>
-          <a:ext cx="10149840" cy="1920240"/>
+          <a:off x="914400" y="2523744"/>
+          <a:ext cx="10149840" cy="1828800"/>
         </p:xfrm>
         <a:graphic>
           <a:graphicData uri="http://schemas.openxmlformats.org/drawingml/2006/table">
@@ -4750,316 +4873,316 @@
                 <a:tableStyleId>{5C22544A-7EE6-4342-B048-85BDC9FD1C3A}</a:tableStyleId>
               </a:tblPr>
               <a:tblGrid>
-                <a:gridCol w="3200400"/>
-                <a:gridCol w="3657600"/>
-                <a:gridCol w="3291840"/>
+                <a:gridCol w="3108960"/>
+                <a:gridCol w="3566160"/>
+                <a:gridCol w="3474720"/>
               </a:tblGrid>
-              <a:tr h="384048">
-                <a:tc>
-                  <a:txBody>
-                    <a:bodyPr wrap="square"/>
-                    <a:lstStyle/>
-                    <a:p>
-                      <a:r>
-                        <a:rPr sz="1200" b="1">
-                          <a:solidFill>
-                            <a:srgbClr val="5A6673"/>
-                          </a:solidFill>
-                          <a:latin typeface="Segoe UI"/>
+              <a:tr h="365760">
+                <a:tc>
+                  <a:txBody>
+                    <a:bodyPr wrap="square"/>
+                    <a:lstStyle/>
+                    <a:p>
+                      <a:r>
+                        <a:rPr sz="1400" b="1" i="1">
+                          <a:solidFill>
+                            <a:srgbClr val="000000"/>
+                          </a:solidFill>
+                          <a:latin typeface="Times New Roman"/>
                         </a:rPr>
                         <a:t>Quantity</a:t>
                       </a:r>
                     </a:p>
                   </a:txBody>
-                  <a:tcPr marL="0" marR="128016" marT="41148" marB="41148" anchor="ctr">
-                    <a:noFill/>
-                  </a:tcPr>
-                </a:tc>
-                <a:tc>
-                  <a:txBody>
-                    <a:bodyPr wrap="square"/>
-                    <a:lstStyle/>
-                    <a:p>
-                      <a:r>
-                        <a:rPr sz="1200" b="1">
-                          <a:solidFill>
-                            <a:srgbClr val="5A6673"/>
-                          </a:solidFill>
-                          <a:latin typeface="Segoe UI"/>
-                        </a:rPr>
-                        <a:t>Before the pin</a:t>
-                      </a:r>
-                    </a:p>
-                  </a:txBody>
-                  <a:tcPr marL="0" marR="128016" marT="41148" marB="41148" anchor="ctr">
-                    <a:noFill/>
-                  </a:tcPr>
-                </a:tc>
-                <a:tc>
-                  <a:txBody>
-                    <a:bodyPr wrap="square"/>
-                    <a:lstStyle/>
-                    <a:p>
-                      <a:r>
-                        <a:rPr sz="1200" b="1">
-                          <a:solidFill>
-                            <a:srgbClr val="5A6673"/>
-                          </a:solidFill>
-                          <a:latin typeface="Segoe UI"/>
-                        </a:rPr>
-                        <a:t>After the pin</a:t>
-                      </a:r>
-                    </a:p>
-                  </a:txBody>
-                  <a:tcPr marL="0" marR="128016" marT="41148" marB="41148" anchor="ctr">
+                  <a:tcPr marL="0" marR="146304" marT="36576" marB="36576" anchor="ctr">
+                    <a:noFill/>
+                  </a:tcPr>
+                </a:tc>
+                <a:tc>
+                  <a:txBody>
+                    <a:bodyPr wrap="square"/>
+                    <a:lstStyle/>
+                    <a:p>
+                      <a:r>
+                        <a:rPr sz="1400" b="1" i="1">
+                          <a:solidFill>
+                            <a:srgbClr val="000000"/>
+                          </a:solidFill>
+                          <a:latin typeface="Times New Roman"/>
+                        </a:rPr>
+                        <a:t>Before</a:t>
+                      </a:r>
+                    </a:p>
+                  </a:txBody>
+                  <a:tcPr marL="0" marR="146304" marT="36576" marB="36576" anchor="ctr">
+                    <a:noFill/>
+                  </a:tcPr>
+                </a:tc>
+                <a:tc>
+                  <a:txBody>
+                    <a:bodyPr wrap="square"/>
+                    <a:lstStyle/>
+                    <a:p>
+                      <a:r>
+                        <a:rPr sz="1400" b="1" i="1">
+                          <a:solidFill>
+                            <a:srgbClr val="000000"/>
+                          </a:solidFill>
+                          <a:latin typeface="Times New Roman"/>
+                        </a:rPr>
+                        <a:t>After</a:t>
+                      </a:r>
+                    </a:p>
+                  </a:txBody>
+                  <a:tcPr marL="0" marR="146304" marT="36576" marB="36576" anchor="ctr">
                     <a:noFill/>
                   </a:tcPr>
                 </a:tc>
               </a:tr>
-              <a:tr h="384048">
-                <a:tc>
-                  <a:txBody>
-                    <a:bodyPr wrap="square"/>
-                    <a:lstStyle/>
-                    <a:p>
-                      <a:r>
-                        <a:rPr sz="1300" b="0">
-                          <a:solidFill>
-                            <a:srgbClr val="10151C"/>
-                          </a:solidFill>
-                          <a:latin typeface="Segoe UI"/>
+              <a:tr h="365760">
+                <a:tc>
+                  <a:txBody>
+                    <a:bodyPr wrap="square"/>
+                    <a:lstStyle/>
+                    <a:p>
+                      <a:r>
+                        <a:rPr sz="1400" b="0" i="0">
+                          <a:solidFill>
+                            <a:srgbClr val="000000"/>
+                          </a:solidFill>
+                          <a:latin typeface="Times New Roman"/>
                         </a:rPr>
                         <a:t>Corpus</a:t>
                       </a:r>
                     </a:p>
                   </a:txBody>
-                  <a:tcPr marL="0" marR="128016" marT="41148" marB="41148" anchor="ctr">
-                    <a:noFill/>
-                  </a:tcPr>
-                </a:tc>
-                <a:tc>
-                  <a:txBody>
-                    <a:bodyPr wrap="square"/>
-                    <a:lstStyle/>
-                    <a:p>
-                      <a:r>
-                        <a:rPr sz="1300" b="0">
-                          <a:solidFill>
-                            <a:srgbClr val="10151C"/>
-                          </a:solidFill>
-                          <a:latin typeface="Consolas"/>
+                  <a:tcPr marL="0" marR="146304" marT="36576" marB="36576" anchor="ctr">
+                    <a:noFill/>
+                  </a:tcPr>
+                </a:tc>
+                <a:tc>
+                  <a:txBody>
+                    <a:bodyPr wrap="square"/>
+                    <a:lstStyle/>
+                    <a:p>
+                      <a:r>
+                        <a:rPr sz="1400" b="0" i="0">
+                          <a:solidFill>
+                            <a:srgbClr val="000000"/>
+                          </a:solidFill>
+                          <a:latin typeface="Times New Roman"/>
                         </a:rPr>
                         <a:t>672 KB, 47 files, drifting</a:t>
                       </a:r>
                     </a:p>
                   </a:txBody>
-                  <a:tcPr marL="0" marR="128016" marT="41148" marB="41148" anchor="ctr">
-                    <a:noFill/>
-                  </a:tcPr>
-                </a:tc>
-                <a:tc>
-                  <a:txBody>
-                    <a:bodyPr wrap="square"/>
-                    <a:lstStyle/>
-                    <a:p>
-                      <a:r>
-                        <a:rPr sz="1300" b="0">
-                          <a:solidFill>
-                            <a:srgbClr val="10151C"/>
-                          </a:solidFill>
-                          <a:latin typeface="Consolas"/>
+                  <a:tcPr marL="0" marR="146304" marT="36576" marB="36576" anchor="ctr">
+                    <a:noFill/>
+                  </a:tcPr>
+                </a:tc>
+                <a:tc>
+                  <a:txBody>
+                    <a:bodyPr wrap="square"/>
+                    <a:lstStyle/>
+                    <a:p>
+                      <a:r>
+                        <a:rPr sz="1400" b="0" i="0">
+                          <a:solidFill>
+                            <a:srgbClr val="000000"/>
+                          </a:solidFill>
+                          <a:latin typeface="Times New Roman"/>
                         </a:rPr>
                         <a:t>615,141 B, frozen, hashed</a:t>
                       </a:r>
                     </a:p>
                   </a:txBody>
-                  <a:tcPr marL="0" marR="128016" marT="41148" marB="41148" anchor="ctr">
+                  <a:tcPr marL="0" marR="146304" marT="36576" marB="36576" anchor="ctr">
                     <a:noFill/>
                   </a:tcPr>
                 </a:tc>
               </a:tr>
-              <a:tr h="384048">
-                <a:tc>
-                  <a:txBody>
-                    <a:bodyPr wrap="square"/>
-                    <a:lstStyle/>
-                    <a:p>
-                      <a:r>
-                        <a:rPr sz="1300" b="0">
-                          <a:solidFill>
-                            <a:srgbClr val="10151C"/>
-                          </a:solidFill>
-                          <a:latin typeface="Segoe UI"/>
+              <a:tr h="365760">
+                <a:tc>
+                  <a:txBody>
+                    <a:bodyPr wrap="square"/>
+                    <a:lstStyle/>
+                    <a:p>
+                      <a:r>
+                        <a:rPr sz="1400" b="0" i="0">
+                          <a:solidFill>
+                            <a:srgbClr val="000000"/>
+                          </a:solidFill>
+                          <a:latin typeface="Times New Roman"/>
                         </a:rPr>
                         <a:t>Shallow pilot d</a:t>
                       </a:r>
                     </a:p>
                   </a:txBody>
-                  <a:tcPr marL="0" marR="128016" marT="41148" marB="41148" anchor="ctr">
-                    <a:noFill/>
-                  </a:tcPr>
-                </a:tc>
-                <a:tc>
-                  <a:txBody>
-                    <a:bodyPr wrap="square"/>
-                    <a:lstStyle/>
-                    <a:p>
-                      <a:r>
-                        <a:rPr sz="1300" b="0">
-                          <a:solidFill>
-                            <a:srgbClr val="10151C"/>
-                          </a:solidFill>
-                          <a:latin typeface="Consolas"/>
+                  <a:tcPr marL="0" marR="146304" marT="36576" marB="36576" anchor="ctr">
+                    <a:noFill/>
+                  </a:tcPr>
+                </a:tc>
+                <a:tc>
+                  <a:txBody>
+                    <a:bodyPr wrap="square"/>
+                    <a:lstStyle/>
+                    <a:p>
+                      <a:r>
+                        <a:rPr sz="1400" b="0" i="0">
+                          <a:solidFill>
+                            <a:srgbClr val="000000"/>
+                          </a:solidFill>
+                          <a:latin typeface="Times New Roman"/>
                         </a:rPr>
                         <a:t>+0.0535 → −1.2838</a:t>
                       </a:r>
                     </a:p>
                   </a:txBody>
-                  <a:tcPr marL="0" marR="128016" marT="41148" marB="41148" anchor="ctr">
-                    <a:noFill/>
-                  </a:tcPr>
-                </a:tc>
-                <a:tc>
-                  <a:txBody>
-                    <a:bodyPr wrap="square"/>
-                    <a:lstStyle/>
-                    <a:p>
-                      <a:r>
-                        <a:rPr sz="1300" b="0">
-                          <a:solidFill>
-                            <a:srgbClr val="10151C"/>
-                          </a:solidFill>
-                          <a:latin typeface="Consolas"/>
+                  <a:tcPr marL="0" marR="146304" marT="36576" marB="36576" anchor="ctr">
+                    <a:noFill/>
+                  </a:tcPr>
+                </a:tc>
+                <a:tc>
+                  <a:txBody>
+                    <a:bodyPr wrap="square"/>
+                    <a:lstStyle/>
+                    <a:p>
+                      <a:r>
+                        <a:rPr sz="1400" b="0" i="0">
+                          <a:solidFill>
+                            <a:srgbClr val="000000"/>
+                          </a:solidFill>
+                          <a:latin typeface="Times New Roman"/>
                         </a:rPr>
                         <a:t>+0.872</a:t>
                       </a:r>
                     </a:p>
                   </a:txBody>
-                  <a:tcPr marL="0" marR="128016" marT="41148" marB="41148" anchor="ctr">
+                  <a:tcPr marL="0" marR="146304" marT="36576" marB="36576" anchor="ctr">
                     <a:noFill/>
                   </a:tcPr>
                 </a:tc>
               </a:tr>
-              <a:tr h="384048">
-                <a:tc>
-                  <a:txBody>
-                    <a:bodyPr wrap="square"/>
-                    <a:lstStyle/>
-                    <a:p>
-                      <a:r>
-                        <a:rPr sz="1300" b="0">
-                          <a:solidFill>
-                            <a:srgbClr val="10151C"/>
-                          </a:solidFill>
-                          <a:latin typeface="Segoe UI"/>
+              <a:tr h="365760">
+                <a:tc>
+                  <a:txBody>
+                    <a:bodyPr wrap="square"/>
+                    <a:lstStyle/>
+                    <a:p>
+                      <a:r>
+                        <a:rPr sz="1400" b="0" i="0">
+                          <a:solidFill>
+                            <a:srgbClr val="000000"/>
+                          </a:solidFill>
+                          <a:latin typeface="Times New Roman"/>
                         </a:rPr>
                         <a:t>Deep pilot d</a:t>
                       </a:r>
                     </a:p>
                   </a:txBody>
-                  <a:tcPr marL="0" marR="128016" marT="41148" marB="41148" anchor="ctr">
-                    <a:noFill/>
-                  </a:tcPr>
-                </a:tc>
-                <a:tc>
-                  <a:txBody>
-                    <a:bodyPr wrap="square"/>
-                    <a:lstStyle/>
-                    <a:p>
-                      <a:r>
-                        <a:rPr sz="1300" b="0">
-                          <a:solidFill>
-                            <a:srgbClr val="10151C"/>
-                          </a:solidFill>
-                          <a:latin typeface="Consolas"/>
+                  <a:tcPr marL="0" marR="146304" marT="36576" marB="36576" anchor="ctr">
+                    <a:noFill/>
+                  </a:tcPr>
+                </a:tc>
+                <a:tc>
+                  <a:txBody>
+                    <a:bodyPr wrap="square"/>
+                    <a:lstStyle/>
+                    <a:p>
+                      <a:r>
+                        <a:rPr sz="1400" b="0" i="0">
+                          <a:solidFill>
+                            <a:srgbClr val="000000"/>
+                          </a:solidFill>
+                          <a:latin typeface="Times New Roman"/>
                         </a:rPr>
                         <a:t>+0.8313</a:t>
                       </a:r>
                     </a:p>
                   </a:txBody>
-                  <a:tcPr marL="0" marR="128016" marT="41148" marB="41148" anchor="ctr">
-                    <a:noFill/>
-                  </a:tcPr>
-                </a:tc>
-                <a:tc>
-                  <a:txBody>
-                    <a:bodyPr wrap="square"/>
-                    <a:lstStyle/>
-                    <a:p>
-                      <a:r>
-                        <a:rPr sz="1300" b="0">
-                          <a:solidFill>
-                            <a:srgbClr val="10151C"/>
-                          </a:solidFill>
-                          <a:latin typeface="Consolas"/>
+                  <a:tcPr marL="0" marR="146304" marT="36576" marB="36576" anchor="ctr">
+                    <a:noFill/>
+                  </a:tcPr>
+                </a:tc>
+                <a:tc>
+                  <a:txBody>
+                    <a:bodyPr wrap="square"/>
+                    <a:lstStyle/>
+                    <a:p>
+                      <a:r>
+                        <a:rPr sz="1400" b="0" i="0">
+                          <a:solidFill>
+                            <a:srgbClr val="000000"/>
+                          </a:solidFill>
+                          <a:latin typeface="Times New Roman"/>
                         </a:rPr>
                         <a:t>−0.003</a:t>
                       </a:r>
                     </a:p>
                   </a:txBody>
-                  <a:tcPr marL="0" marR="128016" marT="41148" marB="41148" anchor="ctr">
+                  <a:tcPr marL="0" marR="146304" marT="36576" marB="36576" anchor="ctr">
                     <a:noFill/>
                   </a:tcPr>
                 </a:tc>
               </a:tr>
-              <a:tr h="384048">
-                <a:tc>
-                  <a:txBody>
-                    <a:bodyPr wrap="square"/>
-                    <a:lstStyle/>
-                    <a:p>
-                      <a:r>
-                        <a:rPr sz="1300" b="0">
-                          <a:solidFill>
-                            <a:srgbClr val="10151C"/>
-                          </a:solidFill>
-                          <a:latin typeface="Segoe UI"/>
+              <a:tr h="365760">
+                <a:tc>
+                  <a:txBody>
+                    <a:bodyPr wrap="square"/>
+                    <a:lstStyle/>
+                    <a:p>
+                      <a:r>
+                        <a:rPr sz="1400" b="0" i="0">
+                          <a:solidFill>
+                            <a:srgbClr val="000000"/>
+                          </a:solidFill>
+                          <a:latin typeface="Times New Roman"/>
                         </a:rPr>
                         <a:t>Null false-positive rate</a:t>
                       </a:r>
                     </a:p>
                   </a:txBody>
-                  <a:tcPr marL="0" marR="128016" marT="41148" marB="41148" anchor="ctr">
-                    <a:noFill/>
-                  </a:tcPr>
-                </a:tc>
-                <a:tc>
-                  <a:txBody>
-                    <a:bodyPr wrap="square"/>
-                    <a:lstStyle/>
-                    <a:p>
-                      <a:r>
-                        <a:rPr sz="1300" b="0">
-                          <a:solidFill>
-                            <a:srgbClr val="10151C"/>
-                          </a:solidFill>
-                          <a:latin typeface="Consolas"/>
+                  <a:tcPr marL="0" marR="146304" marT="36576" marB="36576" anchor="ctr">
+                    <a:noFill/>
+                  </a:tcPr>
+                </a:tc>
+                <a:tc>
+                  <a:txBody>
+                    <a:bodyPr wrap="square"/>
+                    <a:lstStyle/>
+                    <a:p>
+                      <a:r>
+                        <a:rPr sz="1400" b="0" i="0">
+                          <a:solidFill>
+                            <a:srgbClr val="000000"/>
+                          </a:solidFill>
+                          <a:latin typeface="Times New Roman"/>
                         </a:rPr>
                         <a:t>55%</a:t>
                       </a:r>
                     </a:p>
                   </a:txBody>
-                  <a:tcPr marL="0" marR="128016" marT="41148" marB="41148" anchor="ctr">
-                    <a:noFill/>
-                  </a:tcPr>
-                </a:tc>
-                <a:tc>
-                  <a:txBody>
-                    <a:bodyPr wrap="square"/>
-                    <a:lstStyle/>
-                    <a:p>
-                      <a:r>
-                        <a:rPr sz="1300" b="0">
-                          <a:solidFill>
-                            <a:srgbClr val="10151C"/>
-                          </a:solidFill>
-                          <a:latin typeface="Consolas"/>
+                  <a:tcPr marL="0" marR="146304" marT="36576" marB="36576" anchor="ctr">
+                    <a:noFill/>
+                  </a:tcPr>
+                </a:tc>
+                <a:tc>
+                  <a:txBody>
+                    <a:bodyPr wrap="square"/>
+                    <a:lstStyle/>
+                    <a:p>
+                      <a:r>
+                        <a:rPr sz="1400" b="0" i="0">
+                          <a:solidFill>
+                            <a:srgbClr val="000000"/>
+                          </a:solidFill>
+                          <a:latin typeface="Times New Roman"/>
                         </a:rPr>
                         <a:t>15%</a:t>
                       </a:r>
                     </a:p>
                   </a:txBody>
-                  <a:tcPr marL="0" marR="128016" marT="41148" marB="41148" anchor="ctr">
+                  <a:tcPr marL="0" marR="146304" marT="36576" marB="36576" anchor="ctr">
                     <a:noFill/>
                   </a:tcPr>
                 </a:tc>
@@ -5070,14 +5193,14 @@
       </p:graphicFrame>
       <p:sp>
         <p:nvSpPr>
-          <p:cNvPr id="8" name="TextBox 7"/>
+          <p:cNvPr id="7" name="TextBox 6"/>
           <p:cNvSpPr txBox="1"/>
           <p:nvPr/>
         </p:nvSpPr>
         <p:spPr>
           <a:xfrm>
-            <a:off x="914400" y="5093207"/>
-            <a:ext cx="9692640" cy="822960"/>
+            <a:off x="914400" y="4553712"/>
+            <a:ext cx="10058400" cy="822960"/>
           </a:xfrm>
           <a:prstGeom prst="rect">
             <a:avLst/>
@@ -5092,22 +5215,20 @@
           <a:p>
             <a:pPr>
               <a:lnSpc>
-                <a:spcPct val="135000"/>
+                <a:spcPct val="130000"/>
               </a:lnSpc>
               <a:spcAft>
                 <a:spcPts val="0"/>
               </a:spcAft>
             </a:pPr>
             <a:r>
-              <a:rPr sz="1250" b="0">
+              <a:rPr sz="1250" b="0" i="1">
                 <a:solidFill>
-                  <a:srgbClr val="B4541B"/>
+                  <a:srgbClr val="000000"/>
                 </a:solidFill>
-                <a:latin typeface="Consolas"/>
+                <a:latin typeface="Times New Roman"/>
               </a:rPr>
-              <a:t>A morning editing two unrelated READMEs moved d across zero and past the bar in the
-opposite direction. Same code, same seeds. corpus.txt is now pinned by SHA-256 and
-checked on load; a mismatch refuses to run.</a:t>
+              <a:t>Editing two unrelated README files moved d across zero and past the bar in the opposite direction. corpus.txt is now pinned by SHA-256 and checked on load; a mismatch refuses to run.</a:t>
             </a:r>
           </a:p>
         </p:txBody>
@@ -5146,8 +5267,8 @@
         </p:nvSpPr>
         <p:spPr>
           <a:xfrm>
-            <a:off x="914400" y="658368"/>
-            <a:ext cx="10362895" cy="274320"/>
+            <a:off x="914400" y="566928"/>
+            <a:ext cx="10362895" cy="822960"/>
           </a:xfrm>
           <a:prstGeom prst="rect">
             <a:avLst/>
@@ -5161,81 +5282,42 @@
           <a:lstStyle/>
           <a:p>
             <a:pPr>
-              <a:spcAft>
-                <a:spcPts val="0"/>
-              </a:spcAft>
-            </a:pPr>
-            <a:r>
-              <a:rPr sz="1150" b="1">
-                <a:solidFill>
-                  <a:srgbClr val="1D4E89"/>
-                </a:solidFill>
-                <a:latin typeface="Consolas"/>
-              </a:rPr>
-              <a:t>FINDING 4 · EXPERIMENT 003</a:t>
-            </a:r>
-          </a:p>
-        </p:txBody>
-      </p:sp>
-      <p:sp>
-        <p:nvSpPr>
-          <p:cNvPr id="3" name="TextBox 2"/>
-          <p:cNvSpPr txBox="1"/>
-          <p:nvPr/>
-        </p:nvSpPr>
-        <p:spPr>
-          <a:xfrm>
-            <a:off x="914400" y="987552"/>
-            <a:ext cx="10362895" cy="914400"/>
-          </a:xfrm>
-          <a:prstGeom prst="rect">
-            <a:avLst/>
-          </a:prstGeom>
-          <a:noFill/>
-        </p:spPr>
-        <p:txBody>
-          <a:bodyPr wrap="square" anchor="t" lIns="0" rIns="0" tIns="0" bIns="0">
-            <a:spAutoFit/>
-          </a:bodyPr>
-          <a:lstStyle/>
-          <a:p>
-            <a:pPr>
               <a:lnSpc>
-                <a:spcPct val="105000"/>
+                <a:spcPct val="104000"/>
               </a:lnSpc>
               <a:spcAft>
                 <a:spcPts val="0"/>
               </a:spcAft>
             </a:pPr>
             <a:r>
-              <a:rPr sz="3000" b="1">
+              <a:rPr sz="2800" b="1" i="0">
                 <a:solidFill>
-                  <a:srgbClr val="123045"/>
+                  <a:srgbClr val="000000"/>
                 </a:solidFill>
-                <a:latin typeface="Segoe UI"/>
+                <a:latin typeface="Times New Roman"/>
               </a:rPr>
-              <a:t>First execution of the vendor model, on free hardware</a:t>
+              <a:t>Experiment 003 — first execution of the vendor model</a:t>
             </a:r>
           </a:p>
         </p:txBody>
       </p:sp>
       <p:cxnSp>
         <p:nvCxnSpPr>
-          <p:cNvPr id="4" name="Connector 3"/>
+          <p:cNvPr id="3" name="Connector 2"/>
           <p:cNvCxnSpPr/>
           <p:nvPr/>
         </p:nvCxnSpPr>
         <p:spPr>
           <a:xfrm>
-            <a:off x="914400" y="1673351"/>
+            <a:off x="914400" y="1389888"/>
             <a:ext cx="10362895" cy="0"/>
           </a:xfrm>
           <a:prstGeom prst="line">
             <a:avLst/>
           </a:prstGeom>
-          <a:ln w="12700">
+          <a:ln w="9525">
             <a:solidFill>
-              <a:srgbClr val="D3DAE2"/>
+              <a:srgbClr val="000000"/>
             </a:solidFill>
           </a:ln>
         </p:spPr>
@@ -5256,14 +5338,14 @@
       </p:cxnSp>
       <p:sp>
         <p:nvSpPr>
-          <p:cNvPr id="5" name="TextBox 4"/>
+          <p:cNvPr id="4" name="TextBox 3"/>
           <p:cNvSpPr txBox="1"/>
           <p:nvPr/>
         </p:nvSpPr>
         <p:spPr>
           <a:xfrm>
-            <a:off x="914400" y="6291072"/>
-            <a:ext cx="10362895" cy="256032"/>
+            <a:off x="914400" y="6327648"/>
+            <a:ext cx="10362895" cy="237744"/>
           </a:xfrm>
           <a:prstGeom prst="rect">
             <a:avLst/>
@@ -5282,28 +5364,28 @@
               </a:spcAft>
             </a:pPr>
             <a:r>
-              <a:rPr sz="950" b="0">
+              <a:rPr sz="1000" b="0" i="0">
                 <a:solidFill>
-                  <a:srgbClr val="96A1AB"/>
+                  <a:srgbClr val="000000"/>
                 </a:solidFill>
-                <a:latin typeface="Consolas"/>
+                <a:latin typeface="Times New Roman"/>
               </a:rPr>
-              <a:t>Trust-Gated Fast-Weight Updates for TTT-E2E LLMs     ·     2026-09-15     ·     5</a:t>
+              <a:t>Trust-Gated Fast-Weight Updates for TTT-E2E LLMs   |   2026-09-15   |   5</a:t>
             </a:r>
           </a:p>
         </p:txBody>
       </p:sp>
       <p:graphicFrame>
         <p:nvGraphicFramePr>
-          <p:cNvPr id="6" name="Table 5"/>
+          <p:cNvPr id="5" name="Table 4"/>
           <p:cNvGraphicFramePr>
             <a:graphicFrameLocks noGrp="1"/>
           </p:cNvGraphicFramePr>
           <p:nvPr/>
         </p:nvGraphicFramePr>
         <p:xfrm>
-          <a:off x="914400" y="1920239"/>
-          <a:ext cx="10149840" cy="1536192"/>
+          <a:off x="914400" y="1627632"/>
+          <a:ext cx="10149840" cy="1463040"/>
         </p:xfrm>
         <a:graphic>
           <a:graphicData uri="http://schemas.openxmlformats.org/drawingml/2006/table">
@@ -5316,250 +5398,250 @@
                 <a:gridCol w="2377440"/>
                 <a:gridCol w="4754880"/>
               </a:tblGrid>
-              <a:tr h="384048">
-                <a:tc>
-                  <a:txBody>
-                    <a:bodyPr wrap="square"/>
-                    <a:lstStyle/>
-                    <a:p>
-                      <a:r>
-                        <a:rPr sz="1200" b="1">
-                          <a:solidFill>
-                            <a:srgbClr val="5A6673"/>
-                          </a:solidFill>
-                          <a:latin typeface="Segoe UI"/>
-                        </a:rPr>
-                        <a:t>Quantity</a:t>
-                      </a:r>
-                    </a:p>
-                  </a:txBody>
-                  <a:tcPr marL="0" marR="128016" marT="41148" marB="41148" anchor="ctr">
-                    <a:noFill/>
-                  </a:tcPr>
-                </a:tc>
-                <a:tc>
-                  <a:txBody>
-                    <a:bodyPr wrap="square"/>
-                    <a:lstStyle/>
-                    <a:p>
-                      <a:r>
-                        <a:rPr sz="1200" b="1">
-                          <a:solidFill>
-                            <a:srgbClr val="5A6673"/>
-                          </a:solidFill>
-                          <a:latin typeface="Segoe UI"/>
+              <a:tr h="365760">
+                <a:tc>
+                  <a:txBody>
+                    <a:bodyPr wrap="square"/>
+                    <a:lstStyle/>
+                    <a:p>
+                      <a:r>
+                        <a:rPr sz="1400" b="1" i="1">
+                          <a:solidFill>
+                            <a:srgbClr val="000000"/>
+                          </a:solidFill>
+                          <a:latin typeface="Times New Roman"/>
+                        </a:rPr>
+                        <a:t>Measurement</a:t>
+                      </a:r>
+                    </a:p>
+                  </a:txBody>
+                  <a:tcPr marL="0" marR="146304" marT="36576" marB="36576" anchor="ctr">
+                    <a:noFill/>
+                  </a:tcPr>
+                </a:tc>
+                <a:tc>
+                  <a:txBody>
+                    <a:bodyPr wrap="square"/>
+                    <a:lstStyle/>
+                    <a:p>
+                      <a:r>
+                        <a:rPr sz="1400" b="1" i="1">
+                          <a:solidFill>
+                            <a:srgbClr val="000000"/>
+                          </a:solidFill>
+                          <a:latin typeface="Times New Roman"/>
                         </a:rPr>
                         <a:t>Observed</a:t>
                       </a:r>
                     </a:p>
                   </a:txBody>
-                  <a:tcPr marL="0" marR="128016" marT="41148" marB="41148" anchor="ctr">
-                    <a:noFill/>
-                  </a:tcPr>
-                </a:tc>
-                <a:tc>
-                  <a:txBody>
-                    <a:bodyPr wrap="square"/>
-                    <a:lstStyle/>
-                    <a:p>
-                      <a:r>
-                        <a:rPr sz="1200" b="1">
-                          <a:solidFill>
-                            <a:srgbClr val="5A6673"/>
-                          </a:solidFill>
-                          <a:latin typeface="Segoe UI"/>
+                  <a:tcPr marL="0" marR="146304" marT="36576" marB="36576" anchor="ctr">
+                    <a:noFill/>
+                  </a:tcPr>
+                </a:tc>
+                <a:tc>
+                  <a:txBody>
+                    <a:bodyPr wrap="square"/>
+                    <a:lstStyle/>
+                    <a:p>
+                      <a:r>
+                        <a:rPr sz="1400" b="1" i="1">
+                          <a:solidFill>
+                            <a:srgbClr val="000000"/>
+                          </a:solidFill>
+                          <a:latin typeface="Times New Roman"/>
                         </a:rPr>
                         <a:t>Reconstructed</a:t>
                       </a:r>
                     </a:p>
                   </a:txBody>
-                  <a:tcPr marL="0" marR="128016" marT="41148" marB="41148" anchor="ctr">
+                  <a:tcPr marL="0" marR="146304" marT="36576" marB="36576" anchor="ctr">
                     <a:noFill/>
                   </a:tcPr>
                 </a:tc>
               </a:tr>
-              <a:tr h="384048">
-                <a:tc>
-                  <a:txBody>
-                    <a:bodyPr wrap="square"/>
-                    <a:lstStyle/>
-                    <a:p>
-                      <a:r>
-                        <a:rPr sz="1300" b="0">
-                          <a:solidFill>
-                            <a:srgbClr val="10151C"/>
-                          </a:solidFill>
-                          <a:latin typeface="Segoe UI"/>
+              <a:tr h="365760">
+                <a:tc>
+                  <a:txBody>
+                    <a:bodyPr wrap="square"/>
+                    <a:lstStyle/>
+                    <a:p>
+                      <a:r>
+                        <a:rPr sz="1400" b="0" i="0">
+                          <a:solidFill>
+                            <a:srgbClr val="000000"/>
+                          </a:solidFill>
+                          <a:latin typeface="Times New Roman"/>
                         </a:rPr>
                         <a:t>Trainable parameters</a:t>
                       </a:r>
                     </a:p>
                   </a:txBody>
-                  <a:tcPr marL="0" marR="128016" marT="41148" marB="41148" anchor="ctr">
-                    <a:noFill/>
-                  </a:tcPr>
-                </a:tc>
-                <a:tc>
-                  <a:txBody>
-                    <a:bodyPr wrap="square"/>
-                    <a:lstStyle/>
-                    <a:p>
-                      <a:r>
-                        <a:rPr sz="1300" b="0">
-                          <a:solidFill>
-                            <a:srgbClr val="10151C"/>
-                          </a:solidFill>
-                          <a:latin typeface="Consolas"/>
+                  <a:tcPr marL="0" marR="146304" marT="36576" marB="36576" anchor="ctr">
+                    <a:noFill/>
+                  </a:tcPr>
+                </a:tc>
+                <a:tc>
+                  <a:txBody>
+                    <a:bodyPr wrap="square"/>
+                    <a:lstStyle/>
+                    <a:p>
+                      <a:r>
+                        <a:rPr sz="1400" b="0" i="0">
+                          <a:solidFill>
+                            <a:srgbClr val="000000"/>
+                          </a:solidFill>
+                          <a:latin typeface="Times New Roman"/>
                         </a:rPr>
                         <a:t>184,363,776</a:t>
                       </a:r>
                     </a:p>
                   </a:txBody>
-                  <a:tcPr marL="0" marR="128016" marT="41148" marB="41148" anchor="ctr">
-                    <a:noFill/>
-                  </a:tcPr>
-                </a:tc>
-                <a:tc>
-                  <a:txBody>
-                    <a:bodyPr wrap="square"/>
-                    <a:lstStyle/>
-                    <a:p>
-                      <a:r>
-                        <a:rPr sz="1300" b="0">
-                          <a:solidFill>
-                            <a:srgbClr val="10151C"/>
-                          </a:solidFill>
-                          <a:latin typeface="Segoe UI"/>
-                        </a:rPr>
-                        <a:t>matches to within the RMSNorm weights</a:t>
-                      </a:r>
-                    </a:p>
-                  </a:txBody>
-                  <a:tcPr marL="0" marR="128016" marT="41148" marB="41148" anchor="ctr">
+                  <a:tcPr marL="0" marR="146304" marT="36576" marB="36576" anchor="ctr">
+                    <a:noFill/>
+                  </a:tcPr>
+                </a:tc>
+                <a:tc>
+                  <a:txBody>
+                    <a:bodyPr wrap="square"/>
+                    <a:lstStyle/>
+                    <a:p>
+                      <a:r>
+                        <a:rPr sz="1400" b="0" i="0">
+                          <a:solidFill>
+                            <a:srgbClr val="000000"/>
+                          </a:solidFill>
+                          <a:latin typeface="Times New Roman"/>
+                        </a:rPr>
+                        <a:t>matches to within RMSNorm weights</a:t>
+                      </a:r>
+                    </a:p>
+                  </a:txBody>
+                  <a:tcPr marL="0" marR="146304" marT="36576" marB="36576" anchor="ctr">
                     <a:noFill/>
                   </a:tcPr>
                 </a:tc>
               </a:tr>
-              <a:tr h="384048">
-                <a:tc>
-                  <a:txBody>
-                    <a:bodyPr wrap="square"/>
-                    <a:lstStyle/>
-                    <a:p>
-                      <a:r>
-                        <a:rPr sz="1300" b="0">
-                          <a:solidFill>
-                            <a:srgbClr val="10151C"/>
-                          </a:solidFill>
-                          <a:latin typeface="Segoe UI"/>
+              <a:tr h="365760">
+                <a:tc>
+                  <a:txBody>
+                    <a:bodyPr wrap="square"/>
+                    <a:lstStyle/>
+                    <a:p>
+                      <a:r>
+                        <a:rPr sz="1400" b="0" i="0">
+                          <a:solidFill>
+                            <a:srgbClr val="000000"/>
+                          </a:solidFill>
+                          <a:latin typeface="Times New Roman"/>
                         </a:rPr>
                         <a:t>Inner (fast) weights</a:t>
                       </a:r>
                     </a:p>
                   </a:txBody>
-                  <a:tcPr marL="0" marR="128016" marT="41148" marB="41148" anchor="ctr">
-                    <a:noFill/>
-                  </a:tcPr>
-                </a:tc>
-                <a:tc>
-                  <a:txBody>
-                    <a:bodyPr wrap="square"/>
-                    <a:lstStyle/>
-                    <a:p>
-                      <a:r>
-                        <a:rPr sz="1300" b="0">
-                          <a:solidFill>
-                            <a:srgbClr val="10151C"/>
-                          </a:solidFill>
-                          <a:latin typeface="Consolas"/>
+                  <a:tcPr marL="0" marR="146304" marT="36576" marB="36576" anchor="ctr">
+                    <a:noFill/>
+                  </a:tcPr>
+                </a:tc>
+                <a:tc>
+                  <a:txBody>
+                    <a:bodyPr wrap="square"/>
+                    <a:lstStyle/>
+                    <a:p>
+                      <a:r>
+                        <a:rPr sz="1400" b="0" i="0">
+                          <a:solidFill>
+                            <a:srgbClr val="000000"/>
+                          </a:solidFill>
+                          <a:latin typeface="Times New Roman"/>
                         </a:rPr>
                         <a:t>11,501,568</a:t>
                       </a:r>
                     </a:p>
                   </a:txBody>
-                  <a:tcPr marL="0" marR="128016" marT="41148" marB="41148" anchor="ctr">
-                    <a:noFill/>
-                  </a:tcPr>
-                </a:tc>
-                <a:tc>
-                  <a:txBody>
-                    <a:bodyPr wrap="square"/>
-                    <a:lstStyle/>
-                    <a:p>
-                      <a:r>
-                        <a:rPr sz="1300" b="0">
-                          <a:solidFill>
-                            <a:srgbClr val="10151C"/>
-                          </a:solidFill>
-                          <a:latin typeface="Consolas"/>
-                        </a:rPr>
-                        <a:t>3 × 3 × 768 × 1664 — exact</a:t>
-                      </a:r>
-                    </a:p>
-                  </a:txBody>
-                  <a:tcPr marL="0" marR="128016" marT="41148" marB="41148" anchor="ctr">
+                  <a:tcPr marL="0" marR="146304" marT="36576" marB="36576" anchor="ctr">
+                    <a:noFill/>
+                  </a:tcPr>
+                </a:tc>
+                <a:tc>
+                  <a:txBody>
+                    <a:bodyPr wrap="square"/>
+                    <a:lstStyle/>
+                    <a:p>
+                      <a:r>
+                        <a:rPr sz="1400" b="0" i="0">
+                          <a:solidFill>
+                            <a:srgbClr val="000000"/>
+                          </a:solidFill>
+                          <a:latin typeface="Times New Roman"/>
+                        </a:rPr>
+                        <a:t>3 × 3 × 768 × 1664, exact</a:t>
+                      </a:r>
+                    </a:p>
+                  </a:txBody>
+                  <a:tcPr marL="0" marR="146304" marT="36576" marB="36576" anchor="ctr">
                     <a:noFill/>
                   </a:tcPr>
                 </a:tc>
               </a:tr>
-              <a:tr h="384048">
-                <a:tc>
-                  <a:txBody>
-                    <a:bodyPr wrap="square"/>
-                    <a:lstStyle/>
-                    <a:p>
-                      <a:r>
-                        <a:rPr sz="1300" b="0">
-                          <a:solidFill>
-                            <a:srgbClr val="10151C"/>
-                          </a:solidFill>
-                          <a:latin typeface="Segoe UI"/>
+              <a:tr h="365760">
+                <a:tc>
+                  <a:txBody>
+                    <a:bodyPr wrap="square"/>
+                    <a:lstStyle/>
+                    <a:p>
+                      <a:r>
+                        <a:rPr sz="1400" b="0" i="0">
+                          <a:solidFill>
+                            <a:srgbClr val="000000"/>
+                          </a:solidFill>
+                          <a:latin typeface="Times New Roman"/>
                         </a:rPr>
                         <a:t>Attack surface</a:t>
                       </a:r>
                     </a:p>
                   </a:txBody>
-                  <a:tcPr marL="0" marR="128016" marT="41148" marB="41148" anchor="ctr">
-                    <a:noFill/>
-                  </a:tcPr>
-                </a:tc>
-                <a:tc>
-                  <a:txBody>
-                    <a:bodyPr wrap="square"/>
-                    <a:lstStyle/>
-                    <a:p>
-                      <a:r>
-                        <a:rPr sz="1300" b="0">
-                          <a:solidFill>
-                            <a:srgbClr val="10151C"/>
-                          </a:solidFill>
-                          <a:latin typeface="Consolas"/>
+                  <a:tcPr marL="0" marR="146304" marT="36576" marB="36576" anchor="ctr">
+                    <a:noFill/>
+                  </a:tcPr>
+                </a:tc>
+                <a:tc>
+                  <a:txBody>
+                    <a:bodyPr wrap="square"/>
+                    <a:lstStyle/>
+                    <a:p>
+                      <a:r>
+                        <a:rPr sz="1400" b="0" i="0">
+                          <a:solidFill>
+                            <a:srgbClr val="000000"/>
+                          </a:solidFill>
+                          <a:latin typeface="Times New Roman"/>
                         </a:rPr>
                         <a:t>6.24%</a:t>
                       </a:r>
                     </a:p>
                   </a:txBody>
-                  <a:tcPr marL="0" marR="128016" marT="41148" marB="41148" anchor="ctr">
-                    <a:noFill/>
-                  </a:tcPr>
-                </a:tc>
-                <a:tc>
-                  <a:txBody>
-                    <a:bodyPr wrap="square"/>
-                    <a:lstStyle/>
-                    <a:p>
-                      <a:r>
-                        <a:rPr sz="1300" b="0">
-                          <a:solidFill>
-                            <a:srgbClr val="10151C"/>
-                          </a:solidFill>
-                          <a:latin typeface="Segoe UI"/>
-                        </a:rPr>
-                        <a:t>of all trainable parameters</a:t>
-                      </a:r>
-                    </a:p>
-                  </a:txBody>
-                  <a:tcPr marL="0" marR="128016" marT="41148" marB="41148" anchor="ctr">
+                  <a:tcPr marL="0" marR="146304" marT="36576" marB="36576" anchor="ctr">
+                    <a:noFill/>
+                  </a:tcPr>
+                </a:tc>
+                <a:tc>
+                  <a:txBody>
+                    <a:bodyPr wrap="square"/>
+                    <a:lstStyle/>
+                    <a:p>
+                      <a:r>
+                        <a:rPr sz="1400" b="0" i="0">
+                          <a:solidFill>
+                            <a:srgbClr val="000000"/>
+                          </a:solidFill>
+                          <a:latin typeface="Times New Roman"/>
+                        </a:rPr>
+                        <a:t>of trainable parameters</a:t>
+                      </a:r>
+                    </a:p>
+                  </a:txBody>
+                  <a:tcPr marL="0" marR="146304" marT="36576" marB="36576" anchor="ctr">
                     <a:noFill/>
                   </a:tcPr>
                 </a:tc>
@@ -5570,7 +5652,7 @@
       </p:graphicFrame>
       <p:pic>
         <p:nvPicPr>
-          <p:cNvPr id="7" name="Picture 6" descr="inner_loop_curve.png"/>
+          <p:cNvPr id="6" name="Picture 5" descr="inner_loop_curve.png"/>
           <p:cNvPicPr>
             <a:picLocks noChangeAspect="1"/>
           </p:cNvPicPr>
@@ -5584,8 +5666,8 @@
         </p:blipFill>
         <p:spPr>
           <a:xfrm>
-            <a:off x="2202789" y="3675887"/>
-            <a:ext cx="7786116" cy="2395728"/>
+            <a:off x="2054199" y="3273552"/>
+            <a:ext cx="8083296" cy="2331720"/>
           </a:xfrm>
           <a:prstGeom prst="rect">
             <a:avLst/>
@@ -5594,14 +5676,14 @@
       </p:pic>
       <p:sp>
         <p:nvSpPr>
-          <p:cNvPr id="8" name="TextBox 7"/>
+          <p:cNvPr id="7" name="TextBox 6"/>
           <p:cNvSpPr txBox="1"/>
           <p:nvPr/>
         </p:nvSpPr>
         <p:spPr>
           <a:xfrm>
-            <a:off x="914400" y="6199631"/>
-            <a:ext cx="9692640" cy="822960"/>
+            <a:off x="914400" y="5733288"/>
+            <a:ext cx="10058400" cy="466344"/>
           </a:xfrm>
           <a:prstGeom prst="rect">
             <a:avLst/>
@@ -5616,21 +5698,20 @@
           <a:p>
             <a:pPr>
               <a:lnSpc>
-                <a:spcPct val="135000"/>
+                <a:spcPct val="130000"/>
               </a:lnSpc>
               <a:spcAft>
                 <a:spcPts val="0"/>
               </a:spcAft>
             </a:pPr>
             <a:r>
-              <a:rPr sz="1250" b="0">
+              <a:rPr sz="1250" b="0" i="1">
                 <a:solidFill>
-                  <a:srgbClr val="5A6673"/>
+                  <a:srgbClr val="000000"/>
                 </a:solidFill>
-                <a:latin typeface="Consolas"/>
+                <a:latin typeface="Times New Roman"/>
               </a:rPr>
-              <a:t>125M random init, dummy tokens, seq 8192 · RTX 3070 Ti (SM86), bf16 · runner a7447ce.
-Chunk 1 lands 0.030 nats from a value predicted from two config constants.</a:t>
+              <a:t>125M random init, dummy tokens, seq 8192, RTX 3070 Ti, bf16. Falls 2.035 nats over 8 chunks. Chunk 1 within 0.030 nats of a value predicted from two config constants.</a:t>
             </a:r>
           </a:p>
         </p:txBody>
@@ -5669,8 +5750,8 @@
         </p:nvSpPr>
         <p:spPr>
           <a:xfrm>
-            <a:off x="914400" y="658368"/>
-            <a:ext cx="10362895" cy="274320"/>
+            <a:off x="914400" y="566928"/>
+            <a:ext cx="10362895" cy="822960"/>
           </a:xfrm>
           <a:prstGeom prst="rect">
             <a:avLst/>
@@ -5684,81 +5765,42 @@
           <a:lstStyle/>
           <a:p>
             <a:pPr>
-              <a:spcAft>
-                <a:spcPts val="0"/>
-              </a:spcAft>
-            </a:pPr>
-            <a:r>
-              <a:rPr sz="1150" b="1">
-                <a:solidFill>
-                  <a:srgbClr val="1D4E89"/>
-                </a:solidFill>
-                <a:latin typeface="Consolas"/>
-              </a:rPr>
-              <a:t>FINDING 5 · COST MODEL</a:t>
-            </a:r>
-          </a:p>
-        </p:txBody>
-      </p:sp>
-      <p:sp>
-        <p:nvSpPr>
-          <p:cNvPr id="3" name="TextBox 2"/>
-          <p:cNvSpPr txBox="1"/>
-          <p:nvPr/>
-        </p:nvSpPr>
-        <p:spPr>
-          <a:xfrm>
-            <a:off x="914400" y="987552"/>
-            <a:ext cx="10362895" cy="914400"/>
-          </a:xfrm>
-          <a:prstGeom prst="rect">
-            <a:avLst/>
-          </a:prstGeom>
-          <a:noFill/>
-        </p:spPr>
-        <p:txBody>
-          <a:bodyPr wrap="square" anchor="t" lIns="0" rIns="0" tIns="0" bIns="0">
-            <a:spAutoFit/>
-          </a:bodyPr>
-          <a:lstStyle/>
-          <a:p>
-            <a:pPr>
               <a:lnSpc>
-                <a:spcPct val="105000"/>
+                <a:spcPct val="104000"/>
               </a:lnSpc>
               <a:spcAft>
                 <a:spcPts val="0"/>
               </a:spcAft>
             </a:pPr>
             <a:r>
-              <a:rPr sz="3000" b="1">
+              <a:rPr sz="2800" b="1" i="0">
                 <a:solidFill>
-                  <a:srgbClr val="123045"/>
+                  <a:srgbClr val="000000"/>
                 </a:solidFill>
-                <a:latin typeface="Segoe UI"/>
+                <a:latin typeface="Times New Roman"/>
               </a:rPr>
-              <a:t>The evaluation split is eight times larger than assumed</a:t>
+              <a:t>Cost model — measured against the live bucket</a:t>
             </a:r>
           </a:p>
         </p:txBody>
       </p:sp>
       <p:cxnSp>
         <p:nvCxnSpPr>
-          <p:cNvPr id="4" name="Connector 3"/>
+          <p:cNvPr id="3" name="Connector 2"/>
           <p:cNvCxnSpPr/>
           <p:nvPr/>
         </p:nvCxnSpPr>
         <p:spPr>
           <a:xfrm>
-            <a:off x="914400" y="1673351"/>
+            <a:off x="914400" y="1389888"/>
             <a:ext cx="10362895" cy="0"/>
           </a:xfrm>
           <a:prstGeom prst="line">
             <a:avLst/>
           </a:prstGeom>
-          <a:ln w="12700">
+          <a:ln w="9525">
             <a:solidFill>
-              <a:srgbClr val="D3DAE2"/>
+              <a:srgbClr val="000000"/>
             </a:solidFill>
           </a:ln>
         </p:spPr>
@@ -5779,14 +5821,14 @@
       </p:cxnSp>
       <p:sp>
         <p:nvSpPr>
-          <p:cNvPr id="5" name="TextBox 4"/>
+          <p:cNvPr id="4" name="TextBox 3"/>
           <p:cNvSpPr txBox="1"/>
           <p:nvPr/>
         </p:nvSpPr>
         <p:spPr>
           <a:xfrm>
-            <a:off x="914400" y="6291072"/>
-            <a:ext cx="10362895" cy="256032"/>
+            <a:off x="914400" y="6327648"/>
+            <a:ext cx="10362895" cy="237744"/>
           </a:xfrm>
           <a:prstGeom prst="rect">
             <a:avLst/>
@@ -5805,28 +5847,28 @@
               </a:spcAft>
             </a:pPr>
             <a:r>
-              <a:rPr sz="950" b="0">
+              <a:rPr sz="1000" b="0" i="0">
                 <a:solidFill>
-                  <a:srgbClr val="96A1AB"/>
+                  <a:srgbClr val="000000"/>
                 </a:solidFill>
-                <a:latin typeface="Consolas"/>
+                <a:latin typeface="Times New Roman"/>
               </a:rPr>
-              <a:t>Trust-Gated Fast-Weight Updates for TTT-E2E LLMs     ·     2026-09-15     ·     6</a:t>
+              <a:t>Trust-Gated Fast-Weight Updates for TTT-E2E LLMs   |   2026-09-15   |   6</a:t>
             </a:r>
           </a:p>
         </p:txBody>
       </p:sp>
       <p:graphicFrame>
         <p:nvGraphicFramePr>
-          <p:cNvPr id="6" name="Table 5"/>
+          <p:cNvPr id="5" name="Table 4"/>
           <p:cNvGraphicFramePr>
             <a:graphicFrameLocks noGrp="1"/>
           </p:cNvGraphicFramePr>
           <p:nvPr/>
         </p:nvGraphicFramePr>
         <p:xfrm>
-          <a:off x="914400" y="1920239"/>
-          <a:ext cx="10332720" cy="1920240"/>
+          <a:off x="914400" y="1627632"/>
+          <a:ext cx="10332720" cy="1828800"/>
         </p:xfrm>
         <a:graphic>
           <a:graphicData uri="http://schemas.openxmlformats.org/drawingml/2006/table">
@@ -5835,417 +5877,417 @@
                 <a:tableStyleId>{5C22544A-7EE6-4342-B048-85BDC9FD1C3A}</a:tableStyleId>
               </a:tblPr>
               <a:tblGrid>
-                <a:gridCol w="2377440"/>
-                <a:gridCol w="2103120"/>
-                <a:gridCol w="2468880"/>
-                <a:gridCol w="3383280"/>
+                <a:gridCol w="2286000"/>
+                <a:gridCol w="2011680"/>
+                <a:gridCol w="2560320"/>
+                <a:gridCol w="3474720"/>
               </a:tblGrid>
-              <a:tr h="384048">
-                <a:tc>
-                  <a:txBody>
-                    <a:bodyPr wrap="square"/>
-                    <a:lstStyle/>
-                    <a:p>
-                      <a:r>
-                        <a:rPr sz="1200" b="1">
-                          <a:solidFill>
-                            <a:srgbClr val="5A6673"/>
-                          </a:solidFill>
-                          <a:latin typeface="Segoe UI"/>
+              <a:tr h="365760">
+                <a:tc>
+                  <a:txBody>
+                    <a:bodyPr wrap="square"/>
+                    <a:lstStyle/>
+                    <a:p>
+                      <a:r>
+                        <a:rPr sz="1400" b="1" i="1">
+                          <a:solidFill>
+                            <a:srgbClr val="000000"/>
+                          </a:solidFill>
+                          <a:latin typeface="Times New Roman"/>
                         </a:rPr>
                         <a:t>Quantity</a:t>
                       </a:r>
                     </a:p>
                   </a:txBody>
-                  <a:tcPr marL="0" marR="128016" marT="41148" marB="41148" anchor="ctr">
-                    <a:noFill/>
-                  </a:tcPr>
-                </a:tc>
-                <a:tc>
-                  <a:txBody>
-                    <a:bodyPr wrap="square"/>
-                    <a:lstStyle/>
-                    <a:p>
-                      <a:r>
-                        <a:rPr sz="1200" b="1">
-                          <a:solidFill>
-                            <a:srgbClr val="5A6673"/>
-                          </a:solidFill>
-                          <a:latin typeface="Segoe UI"/>
+                  <a:tcPr marL="0" marR="146304" marT="36576" marB="36576" anchor="ctr">
+                    <a:noFill/>
+                  </a:tcPr>
+                </a:tc>
+                <a:tc>
+                  <a:txBody>
+                    <a:bodyPr wrap="square"/>
+                    <a:lstStyle/>
+                    <a:p>
+                      <a:r>
+                        <a:rPr sz="1400" b="1" i="1">
+                          <a:solidFill>
+                            <a:srgbClr val="000000"/>
+                          </a:solidFill>
+                          <a:latin typeface="Times New Roman"/>
                         </a:rPr>
                         <a:t>Assumed</a:t>
                       </a:r>
                     </a:p>
                   </a:txBody>
-                  <a:tcPr marL="0" marR="128016" marT="41148" marB="41148" anchor="ctr">
-                    <a:noFill/>
-                  </a:tcPr>
-                </a:tc>
-                <a:tc>
-                  <a:txBody>
-                    <a:bodyPr wrap="square"/>
-                    <a:lstStyle/>
-                    <a:p>
-                      <a:r>
-                        <a:rPr sz="1200" b="1">
-                          <a:solidFill>
-                            <a:srgbClr val="5A6673"/>
-                          </a:solidFill>
-                          <a:latin typeface="Segoe UI"/>
+                  <a:tcPr marL="0" marR="146304" marT="36576" marB="36576" anchor="ctr">
+                    <a:noFill/>
+                  </a:tcPr>
+                </a:tc>
+                <a:tc>
+                  <a:txBody>
+                    <a:bodyPr wrap="square"/>
+                    <a:lstStyle/>
+                    <a:p>
+                      <a:r>
+                        <a:rPr sz="1400" b="1" i="1">
+                          <a:solidFill>
+                            <a:srgbClr val="000000"/>
+                          </a:solidFill>
+                          <a:latin typeface="Times New Roman"/>
                         </a:rPr>
                         <a:t>Measured</a:t>
                       </a:r>
                     </a:p>
                   </a:txBody>
-                  <a:tcPr marL="0" marR="128016" marT="41148" marB="41148" anchor="ctr">
-                    <a:noFill/>
-                  </a:tcPr>
-                </a:tc>
-                <a:tc>
-                  <a:txBody>
-                    <a:bodyPr wrap="square"/>
-                    <a:lstStyle/>
-                    <a:p>
-                      <a:r>
-                        <a:rPr sz="1200" b="1">
-                          <a:solidFill>
-                            <a:srgbClr val="5A6673"/>
-                          </a:solidFill>
-                          <a:latin typeface="Segoe UI"/>
+                  <a:tcPr marL="0" marR="146304" marT="36576" marB="36576" anchor="ctr">
+                    <a:noFill/>
+                  </a:tcPr>
+                </a:tc>
+                <a:tc>
+                  <a:txBody>
+                    <a:bodyPr wrap="square"/>
+                    <a:lstStyle/>
+                    <a:p>
+                      <a:r>
+                        <a:rPr sz="1400" b="1" i="1">
+                          <a:solidFill>
+                            <a:srgbClr val="000000"/>
+                          </a:solidFill>
+                          <a:latin typeface="Times New Roman"/>
                         </a:rPr>
                         <a:t>Consequence</a:t>
                       </a:r>
                     </a:p>
                   </a:txBody>
-                  <a:tcPr marL="0" marR="128016" marT="41148" marB="41148" anchor="ctr">
+                  <a:tcPr marL="0" marR="146304" marT="36576" marB="36576" anchor="ctr">
                     <a:noFill/>
                   </a:tcPr>
                 </a:tc>
               </a:tr>
-              <a:tr h="384048">
-                <a:tc>
-                  <a:txBody>
-                    <a:bodyPr wrap="square"/>
-                    <a:lstStyle/>
-                    <a:p>
-                      <a:r>
-                        <a:rPr sz="1300" b="0">
-                          <a:solidFill>
-                            <a:srgbClr val="10151C"/>
-                          </a:solidFill>
-                          <a:latin typeface="Segoe UI"/>
+              <a:tr h="365760">
+                <a:tc>
+                  <a:txBody>
+                    <a:bodyPr wrap="square"/>
+                    <a:lstStyle/>
+                    <a:p>
+                      <a:r>
+                        <a:rPr sz="1400" b="0" i="0">
+                          <a:solidFill>
+                            <a:srgbClr val="000000"/>
+                          </a:solidFill>
+                          <a:latin typeface="Times New Roman"/>
                         </a:rPr>
                         <a:t>/val tokens</a:t>
                       </a:r>
                     </a:p>
                   </a:txBody>
-                  <a:tcPr marL="0" marR="128016" marT="41148" marB="41148" anchor="ctr">
-                    <a:noFill/>
-                  </a:tcPr>
-                </a:tc>
-                <a:tc>
-                  <a:txBody>
-                    <a:bodyPr wrap="square"/>
-                    <a:lstStyle/>
-                    <a:p>
-                      <a:r>
-                        <a:rPr sz="1300" b="0">
-                          <a:solidFill>
-                            <a:srgbClr val="10151C"/>
-                          </a:solidFill>
-                          <a:latin typeface="Consolas"/>
+                  <a:tcPr marL="0" marR="146304" marT="36576" marB="36576" anchor="ctr">
+                    <a:noFill/>
+                  </a:tcPr>
+                </a:tc>
+                <a:tc>
+                  <a:txBody>
+                    <a:bodyPr wrap="square"/>
+                    <a:lstStyle/>
+                    <a:p>
+                      <a:r>
+                        <a:rPr sz="1400" b="0" i="0">
+                          <a:solidFill>
+                            <a:srgbClr val="000000"/>
+                          </a:solidFill>
+                          <a:latin typeface="Times New Roman"/>
                         </a:rPr>
                         <a:t>50M – 1B</a:t>
                       </a:r>
                     </a:p>
                   </a:txBody>
-                  <a:tcPr marL="0" marR="128016" marT="41148" marB="41148" anchor="ctr">
-                    <a:noFill/>
-                  </a:tcPr>
-                </a:tc>
-                <a:tc>
-                  <a:txBody>
-                    <a:bodyPr wrap="square"/>
-                    <a:lstStyle/>
-                    <a:p>
-                      <a:r>
-                        <a:rPr sz="1300" b="0">
-                          <a:solidFill>
-                            <a:srgbClr val="10151C"/>
-                          </a:solidFill>
-                          <a:latin typeface="Consolas"/>
+                  <a:tcPr marL="0" marR="146304" marT="36576" marB="36576" anchor="ctr">
+                    <a:noFill/>
+                  </a:tcPr>
+                </a:tc>
+                <a:tc>
+                  <a:txBody>
+                    <a:bodyPr wrap="square"/>
+                    <a:lstStyle/>
+                    <a:p>
+                      <a:r>
+                        <a:rPr sz="1400" b="0" i="0">
+                          <a:solidFill>
+                            <a:srgbClr val="000000"/>
+                          </a:solidFill>
+                          <a:latin typeface="Times New Roman"/>
                         </a:rPr>
                         <a:t>2,000,168,321</a:t>
                       </a:r>
                     </a:p>
                   </a:txBody>
-                  <a:tcPr marL="0" marR="128016" marT="41148" marB="41148" anchor="ctr">
-                    <a:noFill/>
-                  </a:tcPr>
-                </a:tc>
-                <a:tc>
-                  <a:txBody>
-                    <a:bodyPr wrap="square"/>
-                    <a:lstStyle/>
-                    <a:p>
-                      <a:r>
-                        <a:rPr sz="1300" b="0">
-                          <a:solidFill>
-                            <a:srgbClr val="10151C"/>
-                          </a:solidFill>
-                          <a:latin typeface="Segoe UI"/>
-                        </a:rPr>
-                        <a:t>eval pass 0.9 h → 7.45 h</a:t>
-                      </a:r>
-                    </a:p>
-                  </a:txBody>
-                  <a:tcPr marL="0" marR="128016" marT="41148" marB="41148" anchor="ctr">
+                  <a:tcPr marL="0" marR="146304" marT="36576" marB="36576" anchor="ctr">
+                    <a:noFill/>
+                  </a:tcPr>
+                </a:tc>
+                <a:tc>
+                  <a:txBody>
+                    <a:bodyPr wrap="square"/>
+                    <a:lstStyle/>
+                    <a:p>
+                      <a:r>
+                        <a:rPr sz="1400" b="0" i="0">
+                          <a:solidFill>
+                            <a:srgbClr val="000000"/>
+                          </a:solidFill>
+                          <a:latin typeface="Times New Roman"/>
+                        </a:rPr>
+                        <a:t>eval 0.9 h → 7.45 h</a:t>
+                      </a:r>
+                    </a:p>
+                  </a:txBody>
+                  <a:tcPr marL="0" marR="146304" marT="36576" marB="36576" anchor="ctr">
                     <a:noFill/>
                   </a:tcPr>
                 </a:tc>
               </a:tr>
-              <a:tr h="384048">
-                <a:tc>
-                  <a:txBody>
-                    <a:bodyPr wrap="square"/>
-                    <a:lstStyle/>
-                    <a:p>
-                      <a:r>
-                        <a:rPr sz="1300" b="0">
-                          <a:solidFill>
-                            <a:srgbClr val="10151C"/>
-                          </a:solidFill>
-                          <a:latin typeface="Segoe UI"/>
+              <a:tr h="365760">
+                <a:tc>
+                  <a:txBody>
+                    <a:bodyPr wrap="square"/>
+                    <a:lstStyle/>
+                    <a:p>
+                      <a:r>
+                        <a:rPr sz="1400" b="0" i="0">
+                          <a:solidFill>
+                            <a:srgbClr val="000000"/>
+                          </a:solidFill>
+                          <a:latin typeface="Times New Roman"/>
                         </a:rPr>
                         <a:t>Storage codec</a:t>
                       </a:r>
                     </a:p>
                   </a:txBody>
-                  <a:tcPr marL="0" marR="128016" marT="41148" marB="41148" anchor="ctr">
-                    <a:noFill/>
-                  </a:tcPr>
-                </a:tc>
-                <a:tc>
-                  <a:txBody>
-                    <a:bodyPr wrap="square"/>
-                    <a:lstStyle/>
-                    <a:p>
-                      <a:r>
-                        <a:rPr sz="1300" b="0">
-                          <a:solidFill>
-                            <a:srgbClr val="10151C"/>
-                          </a:solidFill>
-                          <a:latin typeface="Segoe UI"/>
+                  <a:tcPr marL="0" marR="146304" marT="36576" marB="36576" anchor="ctr">
+                    <a:noFill/>
+                  </a:tcPr>
+                </a:tc>
+                <a:tc>
+                  <a:txBody>
+                    <a:bodyPr wrap="square"/>
+                    <a:lstStyle/>
+                    <a:p>
+                      <a:r>
+                        <a:rPr sz="1400" b="0" i="0">
+                          <a:solidFill>
+                            <a:srgbClr val="000000"/>
+                          </a:solidFill>
+                          <a:latin typeface="Times New Roman"/>
                         </a:rPr>
                         <a:t>Blosc ≈ 2.5×</a:t>
                       </a:r>
                     </a:p>
                   </a:txBody>
-                  <a:tcPr marL="0" marR="128016" marT="41148" marB="41148" anchor="ctr">
-                    <a:noFill/>
-                  </a:tcPr>
-                </a:tc>
-                <a:tc>
-                  <a:txBody>
-                    <a:bodyPr wrap="square"/>
-                    <a:lstStyle/>
-                    <a:p>
-                      <a:r>
-                        <a:rPr sz="1300" b="0">
-                          <a:solidFill>
-                            <a:srgbClr val="10151C"/>
-                          </a:solidFill>
-                          <a:latin typeface="Segoe UI"/>
+                  <a:tcPr marL="0" marR="146304" marT="36576" marB="36576" anchor="ctr">
+                    <a:noFill/>
+                  </a:tcPr>
+                </a:tc>
+                <a:tc>
+                  <a:txBody>
+                    <a:bodyPr wrap="square"/>
+                    <a:lstStyle/>
+                    <a:p>
+                      <a:r>
+                        <a:rPr sz="1400" b="0" i="0">
+                          <a:solidFill>
+                            <a:srgbClr val="000000"/>
+                          </a:solidFill>
+                          <a:latin typeface="Times New Roman"/>
                         </a:rPr>
                         <a:t>uncompressed</a:t>
                       </a:r>
                     </a:p>
                   </a:txBody>
-                  <a:tcPr marL="0" marR="128016" marT="41148" marB="41148" anchor="ctr">
-                    <a:noFill/>
-                  </a:tcPr>
-                </a:tc>
-                <a:tc>
-                  <a:txBody>
-                    <a:bodyPr wrap="square"/>
-                    <a:lstStyle/>
-                    <a:p>
-                      <a:r>
-                        <a:rPr sz="1300" b="0">
-                          <a:solidFill>
-                            <a:srgbClr val="10151C"/>
-                          </a:solidFill>
-                          <a:latin typeface="Segoe UI"/>
-                        </a:rPr>
-                        <a:t>chunk-aligned subsampling</a:t>
-                      </a:r>
-                    </a:p>
-                  </a:txBody>
-                  <a:tcPr marL="0" marR="128016" marT="41148" marB="41148" anchor="ctr">
+                  <a:tcPr marL="0" marR="146304" marT="36576" marB="36576" anchor="ctr">
+                    <a:noFill/>
+                  </a:tcPr>
+                </a:tc>
+                <a:tc>
+                  <a:txBody>
+                    <a:bodyPr wrap="square"/>
+                    <a:lstStyle/>
+                    <a:p>
+                      <a:r>
+                        <a:rPr sz="1400" b="0" i="0">
+                          <a:solidFill>
+                            <a:srgbClr val="000000"/>
+                          </a:solidFill>
+                          <a:latin typeface="Times New Roman"/>
+                        </a:rPr>
+                        <a:t>chunk subsampling possible</a:t>
+                      </a:r>
+                    </a:p>
+                  </a:txBody>
+                  <a:tcPr marL="0" marR="146304" marT="36576" marB="36576" anchor="ctr">
                     <a:noFill/>
                   </a:tcPr>
                 </a:tc>
               </a:tr>
-              <a:tr h="384048">
-                <a:tc>
-                  <a:txBody>
-                    <a:bodyPr wrap="square"/>
-                    <a:lstStyle/>
-                    <a:p>
-                      <a:r>
-                        <a:rPr sz="1300" b="0">
-                          <a:solidFill>
-                            <a:srgbClr val="10151C"/>
-                          </a:solidFill>
-                          <a:latin typeface="Segoe UI"/>
+              <a:tr h="365760">
+                <a:tc>
+                  <a:txBody>
+                    <a:bodyPr wrap="square"/>
+                    <a:lstStyle/>
+                    <a:p>
+                      <a:r>
+                        <a:rPr sz="1400" b="0" i="0">
+                          <a:solidFill>
+                            <a:srgbClr val="000000"/>
+                          </a:solidFill>
+                          <a:latin typeface="Times New Roman"/>
                         </a:rPr>
                         <a:t>1B checkpoint</a:t>
                       </a:r>
                     </a:p>
                   </a:txBody>
-                  <a:tcPr marL="0" marR="128016" marT="41148" marB="41148" anchor="ctr">
-                    <a:noFill/>
-                  </a:tcPr>
-                </a:tc>
-                <a:tc>
-                  <a:txBody>
-                    <a:bodyPr wrap="square"/>
-                    <a:lstStyle/>
-                    <a:p>
-                      <a:r>
-                        <a:rPr sz="1300" b="0">
-                          <a:solidFill>
-                            <a:srgbClr val="10151C"/>
-                          </a:solidFill>
-                          <a:latin typeface="Consolas"/>
+                  <a:tcPr marL="0" marR="146304" marT="36576" marB="36576" anchor="ctr">
+                    <a:noFill/>
+                  </a:tcPr>
+                </a:tc>
+                <a:tc>
+                  <a:txBody>
+                    <a:bodyPr wrap="square"/>
+                    <a:lstStyle/>
+                    <a:p>
+                      <a:r>
+                        <a:rPr sz="1400" b="0" i="0">
+                          <a:solidFill>
+                            <a:srgbClr val="000000"/>
+                          </a:solidFill>
+                          <a:latin typeface="Times New Roman"/>
                         </a:rPr>
                         <a:t>5.9 GB</a:t>
                       </a:r>
                     </a:p>
                   </a:txBody>
-                  <a:tcPr marL="0" marR="128016" marT="41148" marB="41148" anchor="ctr">
-                    <a:noFill/>
-                  </a:tcPr>
-                </a:tc>
-                <a:tc>
-                  <a:txBody>
-                    <a:bodyPr wrap="square"/>
-                    <a:lstStyle/>
-                    <a:p>
-                      <a:r>
-                        <a:rPr sz="1300" b="0">
-                          <a:solidFill>
-                            <a:srgbClr val="10151C"/>
-                          </a:solidFill>
-                          <a:latin typeface="Consolas"/>
+                  <a:tcPr marL="0" marR="146304" marT="36576" marB="36576" anchor="ctr">
+                    <a:noFill/>
+                  </a:tcPr>
+                </a:tc>
+                <a:tc>
+                  <a:txBody>
+                    <a:bodyPr wrap="square"/>
+                    <a:lstStyle/>
+                    <a:p>
+                      <a:r>
+                        <a:rPr sz="1400" b="0" i="0">
+                          <a:solidFill>
+                            <a:srgbClr val="000000"/>
+                          </a:solidFill>
+                          <a:latin typeface="Times New Roman"/>
                         </a:rPr>
                         <a:t>5.35 GB</a:t>
                       </a:r>
                     </a:p>
                   </a:txBody>
-                  <a:tcPr marL="0" marR="128016" marT="41148" marB="41148" anchor="ctr">
-                    <a:noFill/>
-                  </a:tcPr>
-                </a:tc>
-                <a:tc>
-                  <a:txBody>
-                    <a:bodyPr wrap="square"/>
-                    <a:lstStyle/>
-                    <a:p>
-                      <a:r>
-                        <a:rPr sz="1300" b="0">
-                          <a:solidFill>
-                            <a:srgbClr val="10151C"/>
-                          </a:solidFill>
-                          <a:latin typeface="Segoe UI"/>
-                        </a:rPr>
-                        <a:t>inside the stated ±10%</a:t>
-                      </a:r>
-                    </a:p>
-                  </a:txBody>
-                  <a:tcPr marL="0" marR="128016" marT="41148" marB="41148" anchor="ctr">
+                  <a:tcPr marL="0" marR="146304" marT="36576" marB="36576" anchor="ctr">
+                    <a:noFill/>
+                  </a:tcPr>
+                </a:tc>
+                <a:tc>
+                  <a:txBody>
+                    <a:bodyPr wrap="square"/>
+                    <a:lstStyle/>
+                    <a:p>
+                      <a:r>
+                        <a:rPr sz="1400" b="0" i="0">
+                          <a:solidFill>
+                            <a:srgbClr val="000000"/>
+                          </a:solidFill>
+                          <a:latin typeface="Times New Roman"/>
+                        </a:rPr>
+                        <a:t>inside stated ±10%</a:t>
+                      </a:r>
+                    </a:p>
+                  </a:txBody>
+                  <a:tcPr marL="0" marR="146304" marT="36576" marB="36576" anchor="ctr">
                     <a:noFill/>
                   </a:tcPr>
                 </a:tc>
               </a:tr>
-              <a:tr h="384048">
-                <a:tc>
-                  <a:txBody>
-                    <a:bodyPr wrap="square"/>
-                    <a:lstStyle/>
-                    <a:p>
-                      <a:r>
-                        <a:rPr sz="1300" b="0">
-                          <a:solidFill>
-                            <a:srgbClr val="10151C"/>
-                          </a:solidFill>
-                          <a:latin typeface="Segoe UI"/>
+              <a:tr h="365760">
+                <a:tc>
+                  <a:txBody>
+                    <a:bodyPr wrap="square"/>
+                    <a:lstStyle/>
+                    <a:p>
+                      <a:r>
+                        <a:rPr sz="1400" b="0" i="0">
+                          <a:solidFill>
+                            <a:srgbClr val="000000"/>
+                          </a:solidFill>
+                          <a:latin typeface="Times New Roman"/>
                         </a:rPr>
                         <a:t>Session total</a:t>
                       </a:r>
                     </a:p>
                   </a:txBody>
-                  <a:tcPr marL="0" marR="128016" marT="41148" marB="41148" anchor="ctr">
-                    <a:noFill/>
-                  </a:tcPr>
-                </a:tc>
-                <a:tc>
-                  <a:txBody>
-                    <a:bodyPr wrap="square"/>
-                    <a:lstStyle/>
-                    <a:p>
-                      <a:r>
-                        <a:rPr sz="1300" b="0">
-                          <a:solidFill>
-                            <a:srgbClr val="10151C"/>
-                          </a:solidFill>
-                          <a:latin typeface="Segoe UI"/>
+                  <a:tcPr marL="0" marR="146304" marT="36576" marB="36576" anchor="ctr">
+                    <a:noFill/>
+                  </a:tcPr>
+                </a:tc>
+                <a:tc>
+                  <a:txBody>
+                    <a:bodyPr wrap="square"/>
+                    <a:lstStyle/>
+                    <a:p>
+                      <a:r>
+                        <a:rPr sz="1400" b="0" i="0">
+                          <a:solidFill>
+                            <a:srgbClr val="000000"/>
+                          </a:solidFill>
+                          <a:latin typeface="Times New Roman"/>
                         </a:rPr>
                         <a:t>≈ 4 h</a:t>
                       </a:r>
                     </a:p>
                   </a:txBody>
-                  <a:tcPr marL="0" marR="128016" marT="41148" marB="41148" anchor="ctr">
-                    <a:noFill/>
-                  </a:tcPr>
-                </a:tc>
-                <a:tc>
-                  <a:txBody>
-                    <a:bodyPr wrap="square"/>
-                    <a:lstStyle/>
-                    <a:p>
-                      <a:r>
-                        <a:rPr sz="1300" b="0">
-                          <a:solidFill>
-                            <a:srgbClr val="10151C"/>
-                          </a:solidFill>
-                          <a:latin typeface="Segoe UI"/>
+                  <a:tcPr marL="0" marR="146304" marT="36576" marB="36576" anchor="ctr">
+                    <a:noFill/>
+                  </a:tcPr>
+                </a:tc>
+                <a:tc>
+                  <a:txBody>
+                    <a:bodyPr wrap="square"/>
+                    <a:lstStyle/>
+                    <a:p>
+                      <a:r>
+                        <a:rPr sz="1400" b="0" i="0">
+                          <a:solidFill>
+                            <a:srgbClr val="000000"/>
+                          </a:solidFill>
+                          <a:latin typeface="Times New Roman"/>
                         </a:rPr>
                         <a:t>≈ 10.5 h</a:t>
                       </a:r>
                     </a:p>
                   </a:txBody>
-                  <a:tcPr marL="0" marR="128016" marT="41148" marB="41148" anchor="ctr">
-                    <a:noFill/>
-                  </a:tcPr>
-                </a:tc>
-                <a:tc>
-                  <a:txBody>
-                    <a:bodyPr wrap="square"/>
-                    <a:lstStyle/>
-                    <a:p>
-                      <a:r>
-                        <a:rPr sz="1300" b="0">
-                          <a:solidFill>
-                            <a:srgbClr val="10151C"/>
-                          </a:solidFill>
-                          <a:latin typeface="Segoe UI"/>
-                        </a:rPr>
-                        <a:t>collides with the 12 h stop</a:t>
-                      </a:r>
-                    </a:p>
-                  </a:txBody>
-                  <a:tcPr marL="0" marR="128016" marT="41148" marB="41148" anchor="ctr">
+                  <a:tcPr marL="0" marR="146304" marT="36576" marB="36576" anchor="ctr">
+                    <a:noFill/>
+                  </a:tcPr>
+                </a:tc>
+                <a:tc>
+                  <a:txBody>
+                    <a:bodyPr wrap="square"/>
+                    <a:lstStyle/>
+                    <a:p>
+                      <a:r>
+                        <a:rPr sz="1400" b="0" i="0">
+                          <a:solidFill>
+                            <a:srgbClr val="000000"/>
+                          </a:solidFill>
+                          <a:latin typeface="Times New Roman"/>
+                        </a:rPr>
+                        <a:t>collides with 12 h stop</a:t>
+                      </a:r>
+                    </a:p>
+                  </a:txBody>
+                  <a:tcPr marL="0" marR="146304" marT="36576" marB="36576" anchor="ctr">
                     <a:noFill/>
                   </a:tcPr>
                 </a:tc>
@@ -6256,14 +6298,14 @@
       </p:graphicFrame>
       <p:sp>
         <p:nvSpPr>
-          <p:cNvPr id="7" name="TextBox 6"/>
+          <p:cNvPr id="6" name="TextBox 5"/>
           <p:cNvSpPr txBox="1"/>
           <p:nvPr/>
         </p:nvSpPr>
         <p:spPr>
           <a:xfrm>
-            <a:off x="914400" y="4059935"/>
-            <a:ext cx="9692640" cy="822960"/>
+            <a:off x="914400" y="3657600"/>
+            <a:ext cx="10058400" cy="822960"/>
           </a:xfrm>
           <a:prstGeom prst="rect">
             <a:avLst/>
@@ -6278,22 +6320,20 @@
           <a:p>
             <a:pPr>
               <a:lnSpc>
-                <a:spcPct val="135000"/>
+                <a:spcPct val="130000"/>
               </a:lnSpc>
               <a:spcAft>
                 <a:spcPts val="0"/>
               </a:spcAft>
             </a:pPr>
             <a:r>
-              <a:rPr sz="1250" b="0">
+              <a:rPr sz="1250" b="0" i="1">
                 <a:solidFill>
-                  <a:srgbClr val="5A6673"/>
+                  <a:srgbClr val="000000"/>
                 </a:solidFill>
-                <a:latin typeface="Consolas"/>
+                <a:latin typeface="Times New Roman"/>
               </a:rPr>
-              <a:t>Because the store is uncompressed, /val is 21 chunks of exactly 100,000,000 tokens.
-Fetching three gives SE 0.0015 nats against a 0.491-nat band, for 1.12 h instead of 7.45.
-Fixed in writing before any baseline result is seen.</a:t>
+              <a:t>/val is 21 chunks of exactly 100,000,000 tokens. Three chunks give SE 0.0015 nats against a 0.491-nat band, for 1.12 h instead of 7.45. Fixed in writing before any baseline result is seen.</a:t>
             </a:r>
           </a:p>
         </p:txBody>
@@ -6332,8 +6372,8 @@
         </p:nvSpPr>
         <p:spPr>
           <a:xfrm>
-            <a:off x="914400" y="658368"/>
-            <a:ext cx="10362895" cy="274320"/>
+            <a:off x="914400" y="566928"/>
+            <a:ext cx="10362895" cy="822960"/>
           </a:xfrm>
           <a:prstGeom prst="rect">
             <a:avLst/>
@@ -6347,81 +6387,42 @@
           <a:lstStyle/>
           <a:p>
             <a:pPr>
-              <a:spcAft>
-                <a:spcPts val="0"/>
-              </a:spcAft>
-            </a:pPr>
-            <a:r>
-              <a:rPr sz="1150" b="1">
-                <a:solidFill>
-                  <a:srgbClr val="1D4E89"/>
-                </a:solidFill>
-                <a:latin typeface="Consolas"/>
-              </a:rPr>
-              <a:t>SCOPE</a:t>
-            </a:r>
-          </a:p>
-        </p:txBody>
-      </p:sp>
-      <p:sp>
-        <p:nvSpPr>
-          <p:cNvPr id="3" name="TextBox 2"/>
-          <p:cNvSpPr txBox="1"/>
-          <p:nvPr/>
-        </p:nvSpPr>
-        <p:spPr>
-          <a:xfrm>
-            <a:off x="914400" y="987552"/>
-            <a:ext cx="10362895" cy="914400"/>
-          </a:xfrm>
-          <a:prstGeom prst="rect">
-            <a:avLst/>
-          </a:prstGeom>
-          <a:noFill/>
-        </p:spPr>
-        <p:txBody>
-          <a:bodyPr wrap="square" anchor="t" lIns="0" rIns="0" tIns="0" bIns="0">
-            <a:spAutoFit/>
-          </a:bodyPr>
-          <a:lstStyle/>
-          <a:p>
-            <a:pPr>
               <a:lnSpc>
-                <a:spcPct val="105000"/>
+                <a:spcPct val="104000"/>
               </a:lnSpc>
               <a:spcAft>
                 <a:spcPts val="0"/>
               </a:spcAft>
             </a:pPr>
             <a:r>
-              <a:rPr sz="3000" b="1">
+              <a:rPr sz="2800" b="1" i="0">
                 <a:solidFill>
-                  <a:srgbClr val="123045"/>
+                  <a:srgbClr val="000000"/>
                 </a:solidFill>
-                <a:latin typeface="Segoe UI"/>
+                <a:latin typeface="Times New Roman"/>
               </a:rPr>
-              <a:t>What is not established</a:t>
+              <a:t>Not established</a:t>
             </a:r>
           </a:p>
         </p:txBody>
       </p:sp>
       <p:cxnSp>
         <p:nvCxnSpPr>
-          <p:cNvPr id="4" name="Connector 3"/>
+          <p:cNvPr id="3" name="Connector 2"/>
           <p:cNvCxnSpPr/>
           <p:nvPr/>
         </p:nvCxnSpPr>
         <p:spPr>
           <a:xfrm>
-            <a:off x="914400" y="1673351"/>
+            <a:off x="914400" y="1389888"/>
             <a:ext cx="10362895" cy="0"/>
           </a:xfrm>
           <a:prstGeom prst="line">
             <a:avLst/>
           </a:prstGeom>
-          <a:ln w="12700">
+          <a:ln w="9525">
             <a:solidFill>
-              <a:srgbClr val="D3DAE2"/>
+              <a:srgbClr val="000000"/>
             </a:solidFill>
           </a:ln>
         </p:spPr>
@@ -6442,14 +6443,14 @@
       </p:cxnSp>
       <p:sp>
         <p:nvSpPr>
-          <p:cNvPr id="5" name="TextBox 4"/>
+          <p:cNvPr id="4" name="TextBox 3"/>
           <p:cNvSpPr txBox="1"/>
           <p:nvPr/>
         </p:nvSpPr>
         <p:spPr>
           <a:xfrm>
-            <a:off x="914400" y="6291072"/>
-            <a:ext cx="10362895" cy="256032"/>
+            <a:off x="914400" y="6327648"/>
+            <a:ext cx="10362895" cy="237744"/>
           </a:xfrm>
           <a:prstGeom prst="rect">
             <a:avLst/>
@@ -6468,27 +6469,27 @@
               </a:spcAft>
             </a:pPr>
             <a:r>
-              <a:rPr sz="950" b="0">
+              <a:rPr sz="1000" b="0" i="0">
                 <a:solidFill>
-                  <a:srgbClr val="96A1AB"/>
+                  <a:srgbClr val="000000"/>
                 </a:solidFill>
-                <a:latin typeface="Consolas"/>
+                <a:latin typeface="Times New Roman"/>
               </a:rPr>
-              <a:t>Trust-Gated Fast-Weight Updates for TTT-E2E LLMs     ·     2026-09-15     ·     7</a:t>
-            </a:r>
-          </a:p>
-        </p:txBody>
-      </p:sp>
-      <p:sp>
-        <p:nvSpPr>
-          <p:cNvPr id="6" name="TextBox 5"/>
+              <a:t>Trust-Gated Fast-Weight Updates for TTT-E2E LLMs   |   2026-09-15   |   7</a:t>
+            </a:r>
+          </a:p>
+        </p:txBody>
+      </p:sp>
+      <p:sp>
+        <p:nvSpPr>
+          <p:cNvPr id="5" name="TextBox 4"/>
           <p:cNvSpPr txBox="1"/>
           <p:nvPr/>
         </p:nvSpPr>
         <p:spPr>
           <a:xfrm>
-            <a:off x="914400" y="1920239"/>
-            <a:ext cx="9692640" cy="3108960"/>
+            <a:off x="914400" y="1627632"/>
+            <a:ext cx="10058400" cy="3657600"/>
           </a:xfrm>
           <a:prstGeom prst="rect">
             <a:avLst/>
@@ -6503,127 +6504,127 @@
           <a:p>
             <a:pPr>
               <a:lnSpc>
-                <a:spcPct val="122000"/>
+                <a:spcPct val="116000"/>
               </a:lnSpc>
               <a:spcAft>
-                <a:spcPts val="1500"/>
+                <a:spcPts val="1100"/>
               </a:spcAft>
             </a:pPr>
             <a:r>
-              <a:rPr sz="1500" b="1">
+              <a:rPr sz="1600" b="1">
                 <a:solidFill>
-                  <a:srgbClr val="10151C"/>
+                  <a:srgbClr val="000000"/>
                 </a:solidFill>
-                <a:latin typeface="Segoe UI"/>
+                <a:latin typeface="Times New Roman"/>
               </a:rPr>
-              <a:t>No kill-gate verdict.</a:t>
-            </a:r>
-            <a:r>
-              <a:rPr sz="1500">
+              <a:t>—  No kill-gate verdict.</a:t>
+            </a:r>
+            <a:r>
+              <a:rPr sz="1600">
                 <a:solidFill>
-                  <a:srgbClr val="5A6673"/>
+                  <a:srgbClr val="000000"/>
                 </a:solidFill>
-                <a:latin typeface="Segoe UI"/>
+                <a:latin typeface="Times New Roman"/>
               </a:rPr>
-              <a:t>  Experiment 001 has not run. PREREGISTERED.md is untouched.</a:t>
+              <a:t>  001 not run. PREREGISTERED.md untouched.</a:t>
             </a:r>
           </a:p>
           <a:p>
             <a:pPr>
               <a:lnSpc>
-                <a:spcPct val="122000"/>
+                <a:spcPct val="116000"/>
               </a:lnSpc>
               <a:spcAft>
-                <a:spcPts val="1500"/>
+                <a:spcPts val="1100"/>
               </a:spcAft>
             </a:pPr>
             <a:r>
-              <a:rPr sz="1500" b="1">
+              <a:rPr sz="1600" b="1">
                 <a:solidFill>
-                  <a:srgbClr val="10151C"/>
+                  <a:srgbClr val="000000"/>
                 </a:solidFill>
-                <a:latin typeface="Segoe UI"/>
+                <a:latin typeface="Times New Roman"/>
               </a:rPr>
-              <a:t>No fast-weight carry result.</a:t>
-            </a:r>
-            <a:r>
-              <a:rPr sz="1500">
+              <a:t>—  No fast-weight carry result.</a:t>
+            </a:r>
+            <a:r>
+              <a:rPr sz="1600">
                 <a:solidFill>
-                  <a:srgbClr val="5A6673"/>
+                  <a:srgbClr val="000000"/>
                 </a:solidFill>
-                <a:latin typeface="Segoe UI"/>
+                <a:latin typeface="Times New Roman"/>
               </a:rPr>
-              <a:t>  The check Experiment 003 exists for is blocked on GPU memory — an 8 GB card is about 2 GB short.</a:t>
+              <a:t>  Blocked on GPU memory; 8 GB card is ~2 GB short.</a:t>
             </a:r>
           </a:p>
           <a:p>
             <a:pPr>
               <a:lnSpc>
-                <a:spcPct val="122000"/>
+                <a:spcPct val="116000"/>
               </a:lnSpc>
               <a:spcAft>
-                <a:spcPts val="1500"/>
+                <a:spcPts val="1100"/>
               </a:spcAft>
             </a:pPr>
             <a:r>
-              <a:rPr sz="1500" b="1">
+              <a:rPr sz="1600" b="1">
                 <a:solidFill>
-                  <a:srgbClr val="10151C"/>
+                  <a:srgbClr val="000000"/>
                 </a:solidFill>
-                <a:latin typeface="Segoe UI"/>
+                <a:latin typeface="Times New Roman"/>
               </a:rPr>
-              <a:t>No 1B baseline.</a:t>
-            </a:r>
-            <a:r>
-              <a:rPr sz="1500">
+              <a:t>—  No 1B baseline.</a:t>
+            </a:r>
+            <a:r>
+              <a:rPr sz="1600">
                 <a:solidFill>
-                  <a:srgbClr val="5A6673"/>
+                  <a:srgbClr val="000000"/>
                 </a:solidFill>
-                <a:latin typeface="Segoe UI"/>
+                <a:latin typeface="Times New Roman"/>
               </a:rPr>
-              <a:t>  Needs a rented Ampere card; Kaggle and Colab are architecturally excluded — cuDNN fused attention requires SM80+.</a:t>
+              <a:t>  Needs rented Ampere. Kaggle and Colab excluded — cuDNN fused attention requires SM80+.</a:t>
             </a:r>
           </a:p>
           <a:p>
             <a:pPr>
               <a:lnSpc>
-                <a:spcPct val="122000"/>
+                <a:spcPct val="116000"/>
               </a:lnSpc>
               <a:spcAft>
-                <a:spcPts val="1500"/>
+                <a:spcPts val="1100"/>
               </a:spcAft>
             </a:pPr>
             <a:r>
-              <a:rPr sz="1500" b="1">
+              <a:rPr sz="1600" b="1">
                 <a:solidFill>
-                  <a:srgbClr val="10151C"/>
+                  <a:srgbClr val="000000"/>
                 </a:solidFill>
-                <a:latin typeface="Segoe UI"/>
+                <a:latin typeface="Times New Roman"/>
               </a:rPr>
-              <a:t>Experiment 002 is not TTT-E2E.</a:t>
-            </a:r>
-            <a:r>
-              <a:rPr sz="1500">
+              <a:t>—  002 is not TTT-E2E.</a:t>
+            </a:r>
+            <a:r>
+              <a:rPr sz="1600">
                 <a:solidFill>
-                  <a:srgbClr val="5A6673"/>
+                  <a:srgbClr val="000000"/>
                 </a:solidFill>
-                <a:latin typeface="Segoe UI"/>
+                <a:latin typeface="Times New Roman"/>
               </a:rPr>
-              <a:t>  A ~0.1M-parameter byte-level stand-in with an unscored realism bar. It cannot return PROCEED at all.</a:t>
-            </a:r>
-          </a:p>
-        </p:txBody>
-      </p:sp>
-      <p:sp>
-        <p:nvSpPr>
-          <p:cNvPr id="7" name="TextBox 6"/>
+              <a:t>  0.1M-parameter stand-in, realism bar unscored, cannot return PROCEED.</a:t>
+            </a:r>
+          </a:p>
+        </p:txBody>
+      </p:sp>
+      <p:sp>
+        <p:nvSpPr>
+          <p:cNvPr id="6" name="TextBox 5"/>
           <p:cNvSpPr txBox="1"/>
           <p:nvPr/>
         </p:nvSpPr>
         <p:spPr>
           <a:xfrm>
-            <a:off x="914400" y="3685031"/>
-            <a:ext cx="9692640" cy="822960"/>
+            <a:off x="914400" y="3364992"/>
+            <a:ext cx="10058400" cy="822960"/>
           </a:xfrm>
           <a:prstGeom prst="rect">
             <a:avLst/>
@@ -6638,22 +6639,20 @@
           <a:p>
             <a:pPr>
               <a:lnSpc>
-                <a:spcPct val="135000"/>
+                <a:spcPct val="130000"/>
               </a:lnSpc>
               <a:spcAft>
                 <a:spcPts val="0"/>
               </a:spcAft>
             </a:pPr>
             <a:r>
-              <a:rPr sz="1250" b="0">
+              <a:rPr sz="1250" b="0" i="1">
                 <a:solidFill>
-                  <a:srgbClr val="5A6673"/>
+                  <a:srgbClr val="000000"/>
                 </a:solidFill>
-                <a:latin typeface="Consolas"/>
+                <a:latin typeface="Times New Roman"/>
               </a:rPr>
-              <a:t>Seven first-launch failures found and fixed on free hardware, including a checkpoint
-restore path that raises on the released artefact and a sequence-length reduction that
-returns NaN rather than an error.</a:t>
+              <a:t>Seven first-launch failures found and fixed on free hardware, including a checkpoint restore path that raises on the released artefact and a sequence-length reduction that returns NaN rather than an error.</a:t>
             </a:r>
           </a:p>
         </p:txBody>
@@ -6692,8 +6691,8 @@
         </p:nvSpPr>
         <p:spPr>
           <a:xfrm>
-            <a:off x="914400" y="658368"/>
-            <a:ext cx="10362895" cy="274320"/>
+            <a:off x="914400" y="566928"/>
+            <a:ext cx="10362895" cy="822960"/>
           </a:xfrm>
           <a:prstGeom prst="rect">
             <a:avLst/>
@@ -6707,81 +6706,42 @@
           <a:lstStyle/>
           <a:p>
             <a:pPr>
-              <a:spcAft>
-                <a:spcPts val="0"/>
-              </a:spcAft>
-            </a:pPr>
-            <a:r>
-              <a:rPr sz="1150" b="1">
-                <a:solidFill>
-                  <a:srgbClr val="1D4E89"/>
-                </a:solidFill>
-                <a:latin typeface="Consolas"/>
-              </a:rPr>
-              <a:t>NEXT</a:t>
-            </a:r>
-          </a:p>
-        </p:txBody>
-      </p:sp>
-      <p:sp>
-        <p:nvSpPr>
-          <p:cNvPr id="3" name="TextBox 2"/>
-          <p:cNvSpPr txBox="1"/>
-          <p:nvPr/>
-        </p:nvSpPr>
-        <p:spPr>
-          <a:xfrm>
-            <a:off x="914400" y="987552"/>
-            <a:ext cx="10362895" cy="914400"/>
-          </a:xfrm>
-          <a:prstGeom prst="rect">
-            <a:avLst/>
-          </a:prstGeom>
-          <a:noFill/>
-        </p:spPr>
-        <p:txBody>
-          <a:bodyPr wrap="square" anchor="t" lIns="0" rIns="0" tIns="0" bIns="0">
-            <a:spAutoFit/>
-          </a:bodyPr>
-          <a:lstStyle/>
-          <a:p>
-            <a:pPr>
               <a:lnSpc>
-                <a:spcPct val="105000"/>
+                <a:spcPct val="104000"/>
               </a:lnSpc>
               <a:spcAft>
                 <a:spcPts val="0"/>
               </a:spcAft>
             </a:pPr>
             <a:r>
-              <a:rPr sz="3000" b="1">
+              <a:rPr sz="2800" b="1" i="0">
                 <a:solidFill>
-                  <a:srgbClr val="123045"/>
+                  <a:srgbClr val="000000"/>
                 </a:solidFill>
-                <a:latin typeface="Segoe UI"/>
+                <a:latin typeface="Times New Roman"/>
               </a:rPr>
-              <a:t>Four hours of rented Ampere closes the remaining gap</a:t>
+              <a:t>Next</a:t>
             </a:r>
           </a:p>
         </p:txBody>
       </p:sp>
       <p:cxnSp>
         <p:nvCxnSpPr>
-          <p:cNvPr id="4" name="Connector 3"/>
+          <p:cNvPr id="3" name="Connector 2"/>
           <p:cNvCxnSpPr/>
           <p:nvPr/>
         </p:nvCxnSpPr>
         <p:spPr>
           <a:xfrm>
-            <a:off x="914400" y="1673351"/>
+            <a:off x="914400" y="1389888"/>
             <a:ext cx="10362895" cy="0"/>
           </a:xfrm>
           <a:prstGeom prst="line">
             <a:avLst/>
           </a:prstGeom>
-          <a:ln w="12700">
+          <a:ln w="9525">
             <a:solidFill>
-              <a:srgbClr val="D3DAE2"/>
+              <a:srgbClr val="000000"/>
             </a:solidFill>
           </a:ln>
         </p:spPr>
@@ -6802,14 +6762,14 @@
       </p:cxnSp>
       <p:sp>
         <p:nvSpPr>
-          <p:cNvPr id="5" name="TextBox 4"/>
+          <p:cNvPr id="4" name="TextBox 3"/>
           <p:cNvSpPr txBox="1"/>
           <p:nvPr/>
         </p:nvSpPr>
         <p:spPr>
           <a:xfrm>
-            <a:off x="914400" y="6291072"/>
-            <a:ext cx="10362895" cy="256032"/>
+            <a:off x="914400" y="6327648"/>
+            <a:ext cx="10362895" cy="237744"/>
           </a:xfrm>
           <a:prstGeom prst="rect">
             <a:avLst/>
@@ -6828,17 +6788,354 @@
               </a:spcAft>
             </a:pPr>
             <a:r>
-              <a:rPr sz="950" b="0">
+              <a:rPr sz="1000" b="0" i="0">
                 <a:solidFill>
-                  <a:srgbClr val="96A1AB"/>
+                  <a:srgbClr val="000000"/>
                 </a:solidFill>
-                <a:latin typeface="Consolas"/>
+                <a:latin typeface="Times New Roman"/>
               </a:rPr>
-              <a:t>Trust-Gated Fast-Weight Updates for TTT-E2E LLMs     ·     2026-09-15     ·     8</a:t>
-            </a:r>
-          </a:p>
-        </p:txBody>
-      </p:sp>
+              <a:t>Trust-Gated Fast-Weight Updates for TTT-E2E LLMs   |   2026-09-15   |   8</a:t>
+            </a:r>
+          </a:p>
+        </p:txBody>
+      </p:sp>
+      <p:graphicFrame>
+        <p:nvGraphicFramePr>
+          <p:cNvPr id="5" name="Table 4"/>
+          <p:cNvGraphicFramePr>
+            <a:graphicFrameLocks noGrp="1"/>
+          </p:cNvGraphicFramePr>
+          <p:nvPr/>
+        </p:nvGraphicFramePr>
+        <p:xfrm>
+          <a:off x="914400" y="1627632"/>
+          <a:ext cx="10332720" cy="1828800"/>
+        </p:xfrm>
+        <a:graphic>
+          <a:graphicData uri="http://schemas.openxmlformats.org/drawingml/2006/table">
+            <a:tbl>
+              <a:tblPr>
+                <a:tableStyleId>{5C22544A-7EE6-4342-B048-85BDC9FD1C3A}</a:tableStyleId>
+              </a:tblPr>
+              <a:tblGrid>
+                <a:gridCol w="4023360"/>
+                <a:gridCol w="3657600"/>
+                <a:gridCol w="2651760"/>
+              </a:tblGrid>
+              <a:tr h="365760">
+                <a:tc>
+                  <a:txBody>
+                    <a:bodyPr wrap="square"/>
+                    <a:lstStyle/>
+                    <a:p>
+                      <a:r>
+                        <a:rPr sz="1400" b="1" i="1">
+                          <a:solidFill>
+                            <a:srgbClr val="000000"/>
+                          </a:solidFill>
+                          <a:latin typeface="Times New Roman"/>
+                        </a:rPr>
+                        <a:t>Step</a:t>
+                      </a:r>
+                    </a:p>
+                  </a:txBody>
+                  <a:tcPr marL="0" marR="146304" marT="36576" marB="36576" anchor="ctr">
+                    <a:noFill/>
+                  </a:tcPr>
+                </a:tc>
+                <a:tc>
+                  <a:txBody>
+                    <a:bodyPr wrap="square"/>
+                    <a:lstStyle/>
+                    <a:p>
+                      <a:r>
+                        <a:rPr sz="1400" b="1" i="1">
+                          <a:solidFill>
+                            <a:srgbClr val="000000"/>
+                          </a:solidFill>
+                          <a:latin typeface="Times New Roman"/>
+                        </a:rPr>
+                        <a:t>Requires</a:t>
+                      </a:r>
+                    </a:p>
+                  </a:txBody>
+                  <a:tcPr marL="0" marR="146304" marT="36576" marB="36576" anchor="ctr">
+                    <a:noFill/>
+                  </a:tcPr>
+                </a:tc>
+                <a:tc>
+                  <a:txBody>
+                    <a:bodyPr wrap="square"/>
+                    <a:lstStyle/>
+                    <a:p>
+                      <a:r>
+                        <a:rPr sz="1400" b="1" i="1">
+                          <a:solidFill>
+                            <a:srgbClr val="000000"/>
+                          </a:solidFill>
+                          <a:latin typeface="Times New Roman"/>
+                        </a:rPr>
+                        <a:t>Cost</a:t>
+                      </a:r>
+                    </a:p>
+                  </a:txBody>
+                  <a:tcPr marL="0" marR="146304" marT="36576" marB="36576" anchor="ctr">
+                    <a:noFill/>
+                  </a:tcPr>
+                </a:tc>
+              </a:tr>
+              <a:tr h="365760">
+                <a:tc>
+                  <a:txBody>
+                    <a:bodyPr wrap="square"/>
+                    <a:lstStyle/>
+                    <a:p>
+                      <a:r>
+                        <a:rPr sz="1400" b="0" i="0">
+                          <a:solidFill>
+                            <a:srgbClr val="000000"/>
+                          </a:solidFill>
+                          <a:latin typeface="Times New Roman"/>
+                        </a:rPr>
+                        <a:t>1. Fast-weight carry (003)</a:t>
+                      </a:r>
+                    </a:p>
+                  </a:txBody>
+                  <a:tcPr marL="0" marR="146304" marT="36576" marB="36576" anchor="ctr">
+                    <a:noFill/>
+                  </a:tcPr>
+                </a:tc>
+                <a:tc>
+                  <a:txBody>
+                    <a:bodyPr wrap="square"/>
+                    <a:lstStyle/>
+                    <a:p>
+                      <a:r>
+                        <a:rPr sz="1400" b="0" i="0">
+                          <a:solidFill>
+                            <a:srgbClr val="000000"/>
+                          </a:solidFill>
+                          <a:latin typeface="Times New Roman"/>
+                        </a:rPr>
+                        <a:t>Ampere GPU, ~16 GB</a:t>
+                      </a:r>
+                    </a:p>
+                  </a:txBody>
+                  <a:tcPr marL="0" marR="146304" marT="36576" marB="36576" anchor="ctr">
+                    <a:noFill/>
+                  </a:tcPr>
+                </a:tc>
+                <a:tc>
+                  <a:txBody>
+                    <a:bodyPr wrap="square"/>
+                    <a:lstStyle/>
+                    <a:p>
+                      <a:r>
+                        <a:rPr sz="1400" b="0" i="0">
+                          <a:solidFill>
+                            <a:srgbClr val="000000"/>
+                          </a:solidFill>
+                          <a:latin typeface="Times New Roman"/>
+                        </a:rPr>
+                        <a:t>~1 h</a:t>
+                      </a:r>
+                    </a:p>
+                  </a:txBody>
+                  <a:tcPr marL="0" marR="146304" marT="36576" marB="36576" anchor="ctr">
+                    <a:noFill/>
+                  </a:tcPr>
+                </a:tc>
+              </a:tr>
+              <a:tr h="365760">
+                <a:tc>
+                  <a:txBody>
+                    <a:bodyPr wrap="square"/>
+                    <a:lstStyle/>
+                    <a:p>
+                      <a:r>
+                        <a:rPr sz="1400" b="0" i="0">
+                          <a:solidFill>
+                            <a:srgbClr val="000000"/>
+                          </a:solidFill>
+                          <a:latin typeface="Times New Roman"/>
+                        </a:rPr>
+                        <a:t>2. 125M rehearsal</a:t>
+                      </a:r>
+                    </a:p>
+                  </a:txBody>
+                  <a:tcPr marL="0" marR="146304" marT="36576" marB="36576" anchor="ctr">
+                    <a:noFill/>
+                  </a:tcPr>
+                </a:tc>
+                <a:tc>
+                  <a:txBody>
+                    <a:bodyPr wrap="square"/>
+                    <a:lstStyle/>
+                    <a:p>
+                      <a:r>
+                        <a:rPr sz="1400" b="0" i="0">
+                          <a:solidFill>
+                            <a:srgbClr val="000000"/>
+                          </a:solidFill>
+                          <a:latin typeface="Times New Roman"/>
+                        </a:rPr>
+                        <a:t>checkpoint already fetched</a:t>
+                      </a:r>
+                    </a:p>
+                  </a:txBody>
+                  <a:tcPr marL="0" marR="146304" marT="36576" marB="36576" anchor="ctr">
+                    <a:noFill/>
+                  </a:tcPr>
+                </a:tc>
+                <a:tc>
+                  <a:txBody>
+                    <a:bodyPr wrap="square"/>
+                    <a:lstStyle/>
+                    <a:p>
+                      <a:r>
+                        <a:rPr sz="1400" b="0" i="0">
+                          <a:solidFill>
+                            <a:srgbClr val="000000"/>
+                          </a:solidFill>
+                          <a:latin typeface="Times New Roman"/>
+                        </a:rPr>
+                        <a:t>~0.5 h</a:t>
+                      </a:r>
+                    </a:p>
+                  </a:txBody>
+                  <a:tcPr marL="0" marR="146304" marT="36576" marB="36576" anchor="ctr">
+                    <a:noFill/>
+                  </a:tcPr>
+                </a:tc>
+              </a:tr>
+              <a:tr h="365760">
+                <a:tc>
+                  <a:txBody>
+                    <a:bodyPr wrap="square"/>
+                    <a:lstStyle/>
+                    <a:p>
+                      <a:r>
+                        <a:rPr sz="1400" b="0" i="0">
+                          <a:solidFill>
+                            <a:srgbClr val="000000"/>
+                          </a:solidFill>
+                          <a:latin typeface="Times New Roman"/>
+                        </a:rPr>
+                        <a:t>3. 1B baseline vs 2.314–2.805</a:t>
+                      </a:r>
+                    </a:p>
+                  </a:txBody>
+                  <a:tcPr marL="0" marR="146304" marT="36576" marB="36576" anchor="ctr">
+                    <a:noFill/>
+                  </a:tcPr>
+                </a:tc>
+                <a:tc>
+                  <a:txBody>
+                    <a:bodyPr wrap="square"/>
+                    <a:lstStyle/>
+                    <a:p>
+                      <a:r>
+                        <a:rPr sz="1400" b="0" i="0">
+                          <a:solidFill>
+                            <a:srgbClr val="000000"/>
+                          </a:solidFill>
+                          <a:latin typeface="Times New Roman"/>
+                        </a:rPr>
+                        <a:t>3 /val chunks, rented A100</a:t>
+                      </a:r>
+                    </a:p>
+                  </a:txBody>
+                  <a:tcPr marL="0" marR="146304" marT="36576" marB="36576" anchor="ctr">
+                    <a:noFill/>
+                  </a:tcPr>
+                </a:tc>
+                <a:tc>
+                  <a:txBody>
+                    <a:bodyPr wrap="square"/>
+                    <a:lstStyle/>
+                    <a:p>
+                      <a:r>
+                        <a:rPr sz="1400" b="0" i="0">
+                          <a:solidFill>
+                            <a:srgbClr val="000000"/>
+                          </a:solidFill>
+                          <a:latin typeface="Times New Roman"/>
+                        </a:rPr>
+                        <a:t>≈ 4 h, ≈ ₹560</a:t>
+                      </a:r>
+                    </a:p>
+                  </a:txBody>
+                  <a:tcPr marL="0" marR="146304" marT="36576" marB="36576" anchor="ctr">
+                    <a:noFill/>
+                  </a:tcPr>
+                </a:tc>
+              </a:tr>
+              <a:tr h="365760">
+                <a:tc>
+                  <a:txBody>
+                    <a:bodyPr wrap="square"/>
+                    <a:lstStyle/>
+                    <a:p>
+                      <a:r>
+                        <a:rPr sz="1400" b="0" i="0">
+                          <a:solidFill>
+                            <a:srgbClr val="000000"/>
+                          </a:solidFill>
+                          <a:latin typeface="Times New Roman"/>
+                        </a:rPr>
+                        <a:t>4. Kill-gate (001)</a:t>
+                      </a:r>
+                    </a:p>
+                  </a:txBody>
+                  <a:tcPr marL="0" marR="146304" marT="36576" marB="36576" anchor="ctr">
+                    <a:noFill/>
+                  </a:tcPr>
+                </a:tc>
+                <a:tc>
+                  <a:txBody>
+                    <a:bodyPr wrap="square"/>
+                    <a:lstStyle/>
+                    <a:p>
+                      <a:r>
+                        <a:rPr sz="1400" b="0" i="0">
+                          <a:solidFill>
+                            <a:srgbClr val="000000"/>
+                          </a:solidFill>
+                          <a:latin typeface="Times New Roman"/>
+                        </a:rPr>
+                        <a:t>all of the above</a:t>
+                      </a:r>
+                    </a:p>
+                  </a:txBody>
+                  <a:tcPr marL="0" marR="146304" marT="36576" marB="36576" anchor="ctr">
+                    <a:noFill/>
+                  </a:tcPr>
+                </a:tc>
+                <a:tc>
+                  <a:txBody>
+                    <a:bodyPr wrap="square"/>
+                    <a:lstStyle/>
+                    <a:p>
+                      <a:r>
+                        <a:rPr sz="1400" b="0" i="0">
+                          <a:solidFill>
+                            <a:srgbClr val="000000"/>
+                          </a:solidFill>
+                          <a:latin typeface="Times New Roman"/>
+                        </a:rPr>
+                        <a:t>separate session</a:t>
+                      </a:r>
+                    </a:p>
+                  </a:txBody>
+                  <a:tcPr marL="0" marR="146304" marT="36576" marB="36576" anchor="ctr">
+                    <a:noFill/>
+                  </a:tcPr>
+                </a:tc>
+              </a:tr>
+            </a:tbl>
+          </a:graphicData>
+        </a:graphic>
+      </p:graphicFrame>
       <p:sp>
         <p:nvSpPr>
           <p:cNvPr id="6" name="TextBox 5"/>
@@ -6847,8 +7144,8 @@
         </p:nvSpPr>
         <p:spPr>
           <a:xfrm>
-            <a:off x="914400" y="1920239"/>
-            <a:ext cx="9692640" cy="3108960"/>
+            <a:off x="914400" y="3675888"/>
+            <a:ext cx="10058400" cy="822960"/>
           </a:xfrm>
           <a:prstGeom prst="rect">
             <a:avLst/>
@@ -6863,156 +7160,20 @@
           <a:p>
             <a:pPr>
               <a:lnSpc>
-                <a:spcPct val="122000"/>
-              </a:lnSpc>
-              <a:spcAft>
-                <a:spcPts val="1500"/>
-              </a:spcAft>
-            </a:pPr>
-            <a:r>
-              <a:rPr sz="1500" b="1">
-                <a:solidFill>
-                  <a:srgbClr val="10151C"/>
-                </a:solidFill>
-                <a:latin typeface="Segoe UI"/>
-              </a:rPr>
-              <a:t>1 · Fast-weight carry.</a:t>
-            </a:r>
-            <a:r>
-              <a:rPr sz="1500">
-                <a:solidFill>
-                  <a:srgbClr val="5A6673"/>
-                </a:solidFill>
-                <a:latin typeface="Segoe UI"/>
-              </a:rPr>
-              <a:t>  Finish Experiment 003 at full sequence length. Retires the project's named #1 technical risk.</a:t>
-            </a:r>
-          </a:p>
-          <a:p>
-            <a:pPr>
-              <a:lnSpc>
-                <a:spcPct val="122000"/>
-              </a:lnSpc>
-              <a:spcAft>
-                <a:spcPts val="1500"/>
-              </a:spcAft>
-            </a:pPr>
-            <a:r>
-              <a:rPr sz="1500" b="1">
-                <a:solidFill>
-                  <a:srgbClr val="10151C"/>
-                </a:solidFill>
-                <a:latin typeface="Segoe UI"/>
-              </a:rPr>
-              <a:t>2 · 125M rehearsal.</a:t>
-            </a:r>
-            <a:r>
-              <a:rPr sz="1500">
-                <a:solidFill>
-                  <a:srgbClr val="5A6673"/>
-                </a:solidFill>
-                <a:latin typeface="Segoe UI"/>
-              </a:rPr>
-              <a:t>  Checkpoint already fetched, $0.13 spent. Exercises every failure mode except memory.</a:t>
-            </a:r>
-          </a:p>
-          <a:p>
-            <a:pPr>
-              <a:lnSpc>
-                <a:spcPct val="122000"/>
-              </a:lnSpc>
-              <a:spcAft>
-                <a:spcPts val="1500"/>
-              </a:spcAft>
-            </a:pPr>
-            <a:r>
-              <a:rPr sz="1500" b="1">
-                <a:solidFill>
-                  <a:srgbClr val="10151C"/>
-                </a:solidFill>
-                <a:latin typeface="Segoe UI"/>
-              </a:rPr>
-              <a:t>3 · 1B baseline.</a:t>
-            </a:r>
-            <a:r>
-              <a:rPr sz="1500">
-                <a:solidFill>
-                  <a:srgbClr val="5A6673"/>
-                </a:solidFill>
-                <a:latin typeface="Segoe UI"/>
-              </a:rPr>
-              <a:t>  Three /val chunks against the 2.314–2.805 band. ≈ 4 h, ≈ ₹560.</a:t>
-            </a:r>
-          </a:p>
-          <a:p>
-            <a:pPr>
-              <a:lnSpc>
-                <a:spcPct val="122000"/>
-              </a:lnSpc>
-              <a:spcAft>
-                <a:spcPts val="1500"/>
-              </a:spcAft>
-            </a:pPr>
-            <a:r>
-              <a:rPr sz="1500" b="1">
-                <a:solidFill>
-                  <a:srgbClr val="10151C"/>
-                </a:solidFill>
-                <a:latin typeface="Segoe UI"/>
-              </a:rPr>
-              <a:t>4 · Then, and only then, the kill-gate.</a:t>
-            </a:r>
-            <a:r>
-              <a:rPr sz="1500">
-                <a:solidFill>
-                  <a:srgbClr val="5A6673"/>
-                </a:solidFill>
-                <a:latin typeface="Segoe UI"/>
-              </a:rPr>
-              <a:t>  Five seeds per arm — with the 15% false-positive rate above held in view.</a:t>
-            </a:r>
-          </a:p>
-        </p:txBody>
-      </p:sp>
-      <p:sp>
-        <p:nvSpPr>
-          <p:cNvPr id="7" name="TextBox 6"/>
-          <p:cNvSpPr txBox="1"/>
-          <p:nvPr/>
-        </p:nvSpPr>
-        <p:spPr>
-          <a:xfrm>
-            <a:off x="914400" y="3685031"/>
-            <a:ext cx="9692640" cy="822960"/>
-          </a:xfrm>
-          <a:prstGeom prst="rect">
-            <a:avLst/>
-          </a:prstGeom>
-          <a:noFill/>
-        </p:spPr>
-        <p:txBody>
-          <a:bodyPr wrap="square" anchor="t" lIns="0" rIns="0" tIns="0" bIns="0">
-            <a:spAutoFit/>
-          </a:bodyPr>
-          <a:lstStyle/>
-          <a:p>
-            <a:pPr>
-              <a:lnSpc>
-                <a:spcPct val="135000"/>
+                <a:spcPct val="130000"/>
               </a:lnSpc>
               <a:spcAft>
                 <a:spcPts val="0"/>
               </a:spcAft>
             </a:pPr>
             <a:r>
-              <a:rPr sz="1250" b="0">
+              <a:rPr sz="1250" b="0" i="1">
                 <a:solidFill>
-                  <a:srgbClr val="5A6673"/>
+                  <a:srgbClr val="000000"/>
                 </a:solidFill>
-                <a:latin typeface="Consolas"/>
+                <a:latin typeface="Times New Roman"/>
               </a:rPr>
-              <a:t>Everything measured so far cost $0.13. The dominant line in the session cost model is
-first-launch debugging, and it is being paid in laptop time.</a:t>
+              <a:t>Step 1 retires the project's named principal technical risk. Step 4 must be read against the 15% false-positive rate above.</a:t>
             </a:r>
           </a:p>
         </p:txBody>
